--- a/docs/memos/adaptive-spec-graph-mode-ascend.pptx
+++ b/docs/memos/adaptive-spec-graph-mode-ascend.pptx
@@ -12,8 +12,6 @@
     <p:sldId id="260" r:id="rId11"/>
     <p:sldId id="261" r:id="rId12"/>
     <p:sldId id="262" r:id="rId13"/>
-    <p:sldId id="263" r:id="rId14"/>
-    <p:sldId id="264" r:id="rId15"/>
   </p:sldIdLst>
   <p:sldSz cx="12191695" cy="6858000" type="screen4x3"/>
   <p:notesSz cx="6858000" cy="9144000"/>
@@ -3112,8 +3110,8 @@
         </p:nvSpPr>
         <p:spPr>
           <a:xfrm>
-            <a:off x="822960" y="2057400"/>
-            <a:ext cx="10515600" cy="2743200"/>
+            <a:off x="822960" y="2194560"/>
+            <a:ext cx="10515600" cy="2560320"/>
           </a:xfrm>
           <a:prstGeom prst="rect">
             <a:avLst/>
@@ -3135,12 +3133,14 @@
               </a:spcAft>
             </a:pPr>
             <a:r>
-              <a:rPr sz="4000" b="1" i="0">
+              <a:rPr sz="3800" b="1">
                 <a:solidFill>
                   <a:srgbClr val="1B222E"/>
                 </a:solidFill>
+                <a:latin typeface="微软雅黑"/>
+                <a:ea typeface="微软雅黑"/>
               </a:rPr>
-              <a:t>Adaptive speculative decoding under graph mode</a:t>
+              <a:t>自适应投机解码的图模式代价</a:t>
             </a:r>
           </a:p>
           <a:p>
@@ -3153,30 +3153,34 @@
               </a:spcAft>
             </a:pPr>
             <a:r>
-              <a:rPr sz="2100" b="0" i="0">
+              <a:rPr sz="1900" b="0">
                 <a:solidFill>
                   <a:srgbClr val="5B6677"/>
                 </a:solidFill>
+                <a:latin typeface="微软雅黑"/>
+                <a:ea typeface="微软雅黑"/>
               </a:rPr>
-              <a:t>What it costs on Ascend NPU, and where the real blockers are</a:t>
+              <a:t>昇腾 NPU 上的真实瓶颈在哪 —— 通用模型与 DSV4 两条路线</a:t>
             </a:r>
           </a:p>
           <a:p>
             <a:pPr algn="l">
               <a:spcBef>
-                <a:spcPts val="2200"/>
+                <a:spcPts val="2000"/>
               </a:spcBef>
               <a:spcAft>
                 <a:spcPts val="0"/>
               </a:spcAft>
             </a:pPr>
             <a:r>
-              <a:rPr sz="1300" b="0" i="0">
+              <a:rPr sz="1200" b="0">
                 <a:solidFill>
                   <a:srgbClr val="5B6677"/>
                 </a:solidFill>
+                <a:latin typeface="微软雅黑"/>
+                <a:ea typeface="微软雅黑"/>
               </a:rPr>
-              <a:t>Technical memo · findings grounded in vllm-ascend source, vLLM PR #48692 and the Ascend operator docs</a:t>
+              <a:t>技术备忘录 · 结论出自 vllm-ascend 源码、vLLM PR #48692、昇腾算子文档</a:t>
             </a:r>
           </a:p>
         </p:txBody>
@@ -3215,8 +3219,8 @@
         </p:nvSpPr>
         <p:spPr>
           <a:xfrm>
-            <a:off x="566928" y="384048"/>
-            <a:ext cx="11064240" cy="914400"/>
+            <a:off x="502920" y="274320"/>
+            <a:ext cx="11247120" cy="868680"/>
           </a:xfrm>
           <a:prstGeom prst="rect">
             <a:avLst/>
@@ -3238,30 +3242,34 @@
               </a:spcAft>
             </a:pPr>
             <a:r>
-              <a:rPr sz="2800" b="1" i="0">
+              <a:rPr sz="2500" b="1">
                 <a:solidFill>
                   <a:srgbClr val="1B222E"/>
                 </a:solidFill>
+                <a:latin typeface="微软雅黑"/>
+                <a:ea typeface="微软雅黑"/>
               </a:rPr>
-              <a:t>The question</a:t>
+              <a:t>结论速览</a:t>
             </a:r>
           </a:p>
           <a:p>
             <a:pPr algn="l">
               <a:spcBef>
-                <a:spcPts val="400"/>
+                <a:spcPts val="300"/>
               </a:spcBef>
               <a:spcAft>
                 <a:spcPts val="0"/>
               </a:spcAft>
             </a:pPr>
             <a:r>
-              <a:rPr sz="1350" b="0" i="0">
+              <a:rPr sz="1200" b="0">
                 <a:solidFill>
                   <a:srgbClr val="5B6677"/>
                 </a:solidFill>
+                <a:latin typeface="微软雅黑"/>
+                <a:ea typeface="微软雅黑"/>
               </a:rPr>
-              <a:t>Why “graph-mode efficiency” is the crux of adaptive speculation</a:t>
+              <a:t>自适应投机按置信度给每个请求分配 K_i 以少算 target token;设备图要求形状/地址/执行路径固定。问题不是“能不能省”,而是“为适配图付出的额外开销是否吃掉收益”</a:t>
             </a:r>
           </a:p>
         </p:txBody>
@@ -3274,8 +3282,8 @@
         </p:nvSpPr>
         <p:spPr>
           <a:xfrm>
-            <a:off x="566928" y="1298448"/>
-            <a:ext cx="1371600" cy="26000"/>
+            <a:off x="502920" y="1115568"/>
+            <a:ext cx="1188720" cy="24000"/>
           </a:xfrm>
           <a:prstGeom prst="rect">
             <a:avLst/>
@@ -3310,16 +3318,543 @@
           </a:p>
         </p:txBody>
       </p:sp>
+      <p:graphicFrame>
+        <p:nvGraphicFramePr>
+          <p:cNvPr id="4" name="Table 3"/>
+          <p:cNvGraphicFramePr>
+            <a:graphicFrameLocks noGrp="1"/>
+          </p:cNvGraphicFramePr>
+          <p:nvPr/>
+        </p:nvGraphicFramePr>
+        <p:xfrm>
+          <a:off x="502920" y="1600200"/>
+          <a:ext cx="11247119" cy="2926080"/>
+        </p:xfrm>
+        <a:graphic>
+          <a:graphicData uri="http://schemas.openxmlformats.org/drawingml/2006/table">
+            <a:tbl>
+              <a:tblPr firstRow="1" bandRow="1">
+                <a:tableStyleId>{5C22544A-7EE6-4342-B048-85BDC9FD1C3A}</a:tableStyleId>
+              </a:tblPr>
+              <a:tblGrid>
+                <a:gridCol w="1912010"/>
+                <a:gridCol w="6748272"/>
+                <a:gridCol w="2586837"/>
+              </a:tblGrid>
+              <a:tr h="731520">
+                <a:tc>
+                  <a:txBody>
+                    <a:bodyPr wrap="square"/>
+                    <a:lstStyle/>
+                    <a:p>
+                      <a:pPr>
+                        <a:spcBef>
+                          <a:spcPts val="0"/>
+                        </a:spcBef>
+                        <a:spcAft>
+                          <a:spcPts val="0"/>
+                        </a:spcAft>
+                      </a:pPr>
+                      <a:r>
+                        <a:rPr sz="1150" b="1">
+                          <a:solidFill>
+                            <a:srgbClr val="1B222E"/>
+                          </a:solidFill>
+                          <a:latin typeface="微软雅黑"/>
+                          <a:ea typeface="微软雅黑"/>
+                        </a:rPr>
+                        <a:t/>
+                      </a:r>
+                    </a:p>
+                  </a:txBody>
+                  <a:tcPr marL="64008" marR="64008" marT="18288" marB="18288">
+                    <a:solidFill>
+                      <a:srgbClr val="F2F5F9"/>
+                    </a:solidFill>
+                  </a:tcPr>
+                </a:tc>
+                <a:tc>
+                  <a:txBody>
+                    <a:bodyPr wrap="square"/>
+                    <a:lstStyle/>
+                    <a:p>
+                      <a:pPr>
+                        <a:spcBef>
+                          <a:spcPts val="0"/>
+                        </a:spcBef>
+                        <a:spcAft>
+                          <a:spcPts val="0"/>
+                        </a:spcAft>
+                      </a:pPr>
+                      <a:r>
+                        <a:rPr sz="1150" b="1">
+                          <a:solidFill>
+                            <a:srgbClr val="1B222E"/>
+                          </a:solidFill>
+                          <a:latin typeface="微软雅黑"/>
+                          <a:ea typeface="微软雅黑"/>
+                        </a:rPr>
+                        <a:t>结论</a:t>
+                      </a:r>
+                    </a:p>
+                  </a:txBody>
+                  <a:tcPr marL="64008" marR="64008" marT="18288" marB="18288">
+                    <a:solidFill>
+                      <a:srgbClr val="F2F5F9"/>
+                    </a:solidFill>
+                  </a:tcPr>
+                </a:tc>
+                <a:tc>
+                  <a:txBody>
+                    <a:bodyPr wrap="square"/>
+                    <a:lstStyle/>
+                    <a:p>
+                      <a:pPr>
+                        <a:spcBef>
+                          <a:spcPts val="0"/>
+                        </a:spcBef>
+                        <a:spcAft>
+                          <a:spcPts val="0"/>
+                        </a:spcAft>
+                      </a:pPr>
+                      <a:r>
+                        <a:rPr sz="1150" b="1">
+                          <a:solidFill>
+                            <a:srgbClr val="1B222E"/>
+                          </a:solidFill>
+                          <a:latin typeface="微软雅黑"/>
+                          <a:ea typeface="微软雅黑"/>
+                        </a:rPr>
+                        <a:t>依据</a:t>
+                      </a:r>
+                    </a:p>
+                  </a:txBody>
+                  <a:tcPr marL="64008" marR="64008" marT="18288" marB="18288">
+                    <a:solidFill>
+                      <a:srgbClr val="F2F5F9"/>
+                    </a:solidFill>
+                  </a:tcPr>
+                </a:tc>
+              </a:tr>
+              <a:tr h="731520">
+                <a:tc>
+                  <a:txBody>
+                    <a:bodyPr wrap="square"/>
+                    <a:lstStyle/>
+                    <a:p>
+                      <a:pPr>
+                        <a:spcBef>
+                          <a:spcPts val="0"/>
+                        </a:spcBef>
+                        <a:spcAft>
+                          <a:spcPts val="0"/>
+                        </a:spcAft>
+                      </a:pPr>
+                      <a:r>
+                        <a:rPr sz="1150" b="0">
+                          <a:solidFill>
+                            <a:srgbClr val="1B222E"/>
+                          </a:solidFill>
+                          <a:latin typeface="微软雅黑"/>
+                          <a:ea typeface="微软雅黑"/>
+                        </a:rPr>
+                        <a:t>① GPU 参考被高估</a:t>
+                      </a:r>
+                    </a:p>
+                  </a:txBody>
+                  <a:tcPr marL="64008" marR="64008" marT="18288" marB="18288">
+                    <a:solidFill>
+                      <a:srgbClr val="FFFFFF"/>
+                    </a:solidFill>
+                  </a:tcPr>
+                </a:tc>
+                <a:tc>
+                  <a:txBody>
+                    <a:bodyPr wrap="square"/>
+                    <a:lstStyle/>
+                    <a:p>
+                      <a:pPr>
+                        <a:spcBef>
+                          <a:spcPts val="0"/>
+                        </a:spcBef>
+                        <a:spcAft>
+                          <a:spcPts val="0"/>
+                        </a:spcAft>
+                      </a:pPr>
+                      <a:r>
+                        <a:rPr sz="1150" b="0">
+                          <a:solidFill>
+                            <a:srgbClr val="1B222E"/>
+                          </a:solidFill>
+                          <a:latin typeface="微软雅黑"/>
+                          <a:ea typeface="微软雅黑"/>
+                        </a:rPr>
+                        <a:t>PR #48692 已关闭未合入;明确不做在线预算分配;仅 FLASH_ATTENTION;</a:t>
+                      </a:r>
+                    </a:p>
+                    <a:p>
+                      <a:pPr>
+                        <a:spcBef>
+                          <a:spcPts val="0"/>
+                        </a:spcBef>
+                        <a:spcAft>
+                          <a:spcPts val="0"/>
+                        </a:spcAft>
+                      </a:pPr>
+                      <a:r>
+                        <a:rPr sz="1150" b="0">
+                          <a:solidFill>
+                            <a:srgbClr val="1B222E"/>
+                          </a:solidFill>
+                          <a:latin typeface="微软雅黑"/>
+                          <a:ea typeface="微软雅黑"/>
+                        </a:rPr>
+                        <a:t>作者自述测不出加速,收益体现在接受率</a:t>
+                      </a:r>
+                    </a:p>
+                  </a:txBody>
+                  <a:tcPr marL="64008" marR="64008" marT="18288" marB="18288">
+                    <a:solidFill>
+                      <a:srgbClr val="FFFFFF"/>
+                    </a:solidFill>
+                  </a:tcPr>
+                </a:tc>
+                <a:tc>
+                  <a:txBody>
+                    <a:bodyPr wrap="square"/>
+                    <a:lstStyle/>
+                    <a:p>
+                      <a:pPr>
+                        <a:spcBef>
+                          <a:spcPts val="0"/>
+                        </a:spcBef>
+                        <a:spcAft>
+                          <a:spcPts val="0"/>
+                        </a:spcAft>
+                      </a:pPr>
+                      <a:r>
+                        <a:rPr sz="1150" b="0">
+                          <a:solidFill>
+                            <a:srgbClr val="1B222E"/>
+                          </a:solidFill>
+                          <a:latin typeface="微软雅黑"/>
+                          <a:ea typeface="微软雅黑"/>
+                        </a:rPr>
+                        <a:t>PR 正文</a:t>
+                      </a:r>
+                    </a:p>
+                  </a:txBody>
+                  <a:tcPr marL="64008" marR="64008" marT="18288" marB="18288">
+                    <a:solidFill>
+                      <a:srgbClr val="FFFFFF"/>
+                    </a:solidFill>
+                  </a:tcPr>
+                </a:tc>
+              </a:tr>
+              <a:tr h="731520">
+                <a:tc>
+                  <a:txBody>
+                    <a:bodyPr wrap="square"/>
+                    <a:lstStyle/>
+                    <a:p>
+                      <a:pPr>
+                        <a:spcBef>
+                          <a:spcPts val="0"/>
+                        </a:spcBef>
+                        <a:spcAft>
+                          <a:spcPts val="0"/>
+                        </a:spcAft>
+                      </a:pPr>
+                      <a:r>
+                        <a:rPr sz="1150" b="0">
+                          <a:solidFill>
+                            <a:srgbClr val="1B222E"/>
+                          </a:solidFill>
+                          <a:latin typeface="微软雅黑"/>
+                          <a:ea typeface="微软雅黑"/>
+                        </a:rPr>
+                        <a:t>② 设备侧长度已存在</a:t>
+                      </a:r>
+                    </a:p>
+                    <a:p>
+                      <a:pPr>
+                        <a:spcBef>
+                          <a:spcPts val="0"/>
+                        </a:spcBef>
+                        <a:spcAft>
+                          <a:spcPts val="0"/>
+                        </a:spcAft>
+                      </a:pPr>
+                      <a:r>
+                        <a:rPr sz="1150" b="0">
+                          <a:solidFill>
+                            <a:srgbClr val="1B222E"/>
+                          </a:solidFill>
+                          <a:latin typeface="微软雅黑"/>
+                          <a:ea typeface="微软雅黑"/>
+                        </a:rPr>
+                        <a:t>(但只在一族算子)</a:t>
+                      </a:r>
+                    </a:p>
+                  </a:txBody>
+                  <a:tcPr marL="64008" marR="64008" marT="18288" marB="18288">
+                    <a:solidFill>
+                      <a:srgbClr val="FFFFFF"/>
+                    </a:solidFill>
+                  </a:tcPr>
+                </a:tc>
+                <a:tc>
+                  <a:txBody>
+                    <a:bodyPr wrap="square"/>
+                    <a:lstStyle/>
+                    <a:p>
+                      <a:pPr>
+                        <a:spcBef>
+                          <a:spcPts val="0"/>
+                        </a:spcBef>
+                        <a:spcAft>
+                          <a:spcPts val="0"/>
+                        </a:spcAft>
+                      </a:pPr>
+                      <a:r>
+                        <a:rPr sz="1150" b="0">
+                          <a:solidFill>
+                            <a:srgbClr val="0E7A4B"/>
+                          </a:solidFill>
+                          <a:latin typeface="微软雅黑"/>
+                          <a:ea typeface="微软雅黑"/>
+                        </a:rPr>
+                        <a:t>DSA / lightning-indexer / SFA 收 torch.Tensor;FIA v2 收 host int 数组。</a:t>
+                      </a:r>
+                    </a:p>
+                    <a:p>
+                      <a:pPr>
+                        <a:spcBef>
+                          <a:spcPts val="0"/>
+                        </a:spcBef>
+                        <a:spcAft>
+                          <a:spcPts val="0"/>
+                        </a:spcAft>
+                      </a:pPr>
+                      <a:r>
+                        <a:rPr sz="1150" b="0">
+                          <a:solidFill>
+                            <a:srgbClr val="0E7A4B"/>
+                          </a:solidFill>
+                          <a:latin typeface="微软雅黑"/>
+                          <a:ea typeface="微软雅黑"/>
+                        </a:rPr>
+                        <a:t>DSV4 走 DSA → 前置条件已满足;通用稠密模型走 FIA → 卡住</a:t>
+                      </a:r>
+                    </a:p>
+                  </a:txBody>
+                  <a:tcPr marL="64008" marR="64008" marT="18288" marB="18288">
+                    <a:solidFill>
+                      <a:srgbClr val="FFFFFF"/>
+                    </a:solidFill>
+                  </a:tcPr>
+                </a:tc>
+                <a:tc>
+                  <a:txBody>
+                    <a:bodyPr wrap="square"/>
+                    <a:lstStyle/>
+                    <a:p>
+                      <a:pPr>
+                        <a:spcBef>
+                          <a:spcPts val="0"/>
+                        </a:spcBef>
+                        <a:spcAft>
+                          <a:spcPts val="0"/>
+                        </a:spcAft>
+                      </a:pPr>
+                      <a:r>
+                        <a:rPr sz="1150" b="0">
+                          <a:solidFill>
+                            <a:srgbClr val="1B222E"/>
+                          </a:solidFill>
+                          <a:latin typeface="微软雅黑"/>
+                          <a:ea typeface="微软雅黑"/>
+                        </a:rPr>
+                        <a:t>device_op.py 签名</a:t>
+                      </a:r>
+                    </a:p>
+                    <a:p>
+                      <a:pPr>
+                        <a:spcBef>
+                          <a:spcPts val="0"/>
+                        </a:spcBef>
+                        <a:spcAft>
+                          <a:spcPts val="0"/>
+                        </a:spcAft>
+                      </a:pPr>
+                      <a:r>
+                        <a:rPr sz="1150" b="0">
+                          <a:solidFill>
+                            <a:srgbClr val="1B222E"/>
+                          </a:solidFill>
+                          <a:latin typeface="微软雅黑"/>
+                          <a:ea typeface="微软雅黑"/>
+                        </a:rPr>
+                        <a:t>昇腾算子文档</a:t>
+                      </a:r>
+                    </a:p>
+                  </a:txBody>
+                  <a:tcPr marL="64008" marR="64008" marT="18288" marB="18288">
+                    <a:solidFill>
+                      <a:srgbClr val="FFFFFF"/>
+                    </a:solidFill>
+                  </a:tcPr>
+                </a:tc>
+              </a:tr>
+              <a:tr h="731520">
+                <a:tc>
+                  <a:txBody>
+                    <a:bodyPr wrap="square"/>
+                    <a:lstStyle/>
+                    <a:p>
+                      <a:pPr>
+                        <a:spcBef>
+                          <a:spcPts val="0"/>
+                        </a:spcBef>
+                        <a:spcAft>
+                          <a:spcPts val="0"/>
+                        </a:spcAft>
+                      </a:pPr>
+                      <a:r>
+                        <a:rPr sz="1150" b="0">
+                          <a:solidFill>
+                            <a:srgbClr val="1B222E"/>
+                          </a:solidFill>
+                          <a:latin typeface="微软雅黑"/>
+                          <a:ea typeface="微软雅黑"/>
+                        </a:rPr>
+                        <a:t>③ 增量代价被误判</a:t>
+                      </a:r>
+                    </a:p>
+                  </a:txBody>
+                  <a:tcPr marL="64008" marR="64008" marT="18288" marB="18288">
+                    <a:solidFill>
+                      <a:srgbClr val="FFFFFF"/>
+                    </a:solidFill>
+                  </a:tcPr>
+                </a:tc>
+                <a:tc>
+                  <a:txBody>
+                    <a:bodyPr wrap="square"/>
+                    <a:lstStyle/>
+                    <a:p>
+                      <a:pPr>
+                        <a:spcBef>
+                          <a:spcPts val="0"/>
+                        </a:spcBef>
+                        <a:spcAft>
+                          <a:spcPts val="0"/>
+                        </a:spcAft>
+                      </a:pPr>
+                      <a:r>
+                        <a:rPr sz="1150" b="0">
+                          <a:solidFill>
+                            <a:srgbClr val="B45309"/>
+                          </a:solidFill>
+                          <a:latin typeface="微软雅黑"/>
+                          <a:ea typeface="微软雅黑"/>
+                        </a:rPr>
+                        <a:t>graph_task_update 固定-K 投机已在付;动态 K 的真正增量是</a:t>
+                      </a:r>
+                    </a:p>
+                    <a:p>
+                      <a:pPr>
+                        <a:spcBef>
+                          <a:spcPts val="0"/>
+                        </a:spcBef>
+                        <a:spcAft>
+                          <a:spcPts val="0"/>
+                        </a:spcAft>
+                      </a:pPr>
+                      <a:r>
+                        <a:rPr sz="1150" b="0">
+                          <a:solidFill>
+                            <a:srgbClr val="B45309"/>
+                          </a:solidFill>
+                          <a:latin typeface="微软雅黑"/>
+                          <a:ea typeface="微软雅黑"/>
+                        </a:rPr>
+                        <a:t>workspace 每轮 miss + 图键爆炸 + padding</a:t>
+                      </a:r>
+                    </a:p>
+                  </a:txBody>
+                  <a:tcPr marL="64008" marR="64008" marT="18288" marB="18288">
+                    <a:solidFill>
+                      <a:srgbClr val="FFFFFF"/>
+                    </a:solidFill>
+                  </a:tcPr>
+                </a:tc>
+                <a:tc>
+                  <a:txBody>
+                    <a:bodyPr wrap="square"/>
+                    <a:lstStyle/>
+                    <a:p>
+                      <a:pPr>
+                        <a:spcBef>
+                          <a:spcPts val="0"/>
+                        </a:spcBef>
+                        <a:spcAft>
+                          <a:spcPts val="0"/>
+                        </a:spcAft>
+                      </a:pPr>
+                      <a:r>
+                        <a:rPr sz="1150" b="0">
+                          <a:solidFill>
+                            <a:srgbClr val="1B222E"/>
+                          </a:solidFill>
+                          <a:latin typeface="微软雅黑"/>
+                          <a:ea typeface="微软雅黑"/>
+                        </a:rPr>
+                        <a:t>attention_v1.py</a:t>
+                      </a:r>
+                    </a:p>
+                    <a:p>
+                      <a:pPr>
+                        <a:spcBef>
+                          <a:spcPts val="0"/>
+                        </a:spcBef>
+                        <a:spcAft>
+                          <a:spcPts val="0"/>
+                        </a:spcAft>
+                      </a:pPr>
+                      <a:r>
+                        <a:rPr sz="1150" b="0">
+                          <a:solidFill>
+                            <a:srgbClr val="1B222E"/>
+                          </a:solidFill>
+                          <a:latin typeface="微软雅黑"/>
+                          <a:ea typeface="微软雅黑"/>
+                        </a:rPr>
+                        <a:t>图 replay 路径</a:t>
+                      </a:r>
+                    </a:p>
+                  </a:txBody>
+                  <a:tcPr marL="64008" marR="64008" marT="18288" marB="18288">
+                    <a:solidFill>
+                      <a:srgbClr val="FFFFFF"/>
+                    </a:solidFill>
+                  </a:tcPr>
+                </a:tc>
+              </a:tr>
+            </a:tbl>
+          </a:graphicData>
+        </a:graphic>
+      </p:graphicFrame>
       <p:sp>
         <p:nvSpPr>
-          <p:cNvPr id="4" name="TextBox 3"/>
+          <p:cNvPr id="5" name="TextBox 4"/>
           <p:cNvSpPr txBox="1"/>
           <p:nvPr/>
         </p:nvSpPr>
         <p:spPr>
           <a:xfrm>
-            <a:off x="566928" y="1600200"/>
-            <a:ext cx="11064240" cy="4206240"/>
+            <a:off x="502920" y="4892040"/>
+            <a:ext cx="11247120" cy="1463040"/>
           </a:xfrm>
           <a:prstGeom prst="rect">
             <a:avLst/>
@@ -3341,84 +3876,34 @@
               </a:spcAft>
             </a:pPr>
             <a:r>
-              <a:rPr sz="1700" b="0" i="0">
+              <a:rPr sz="1700" b="1">
                 <a:solidFill>
-                  <a:srgbClr val="1B222E"/>
+                  <a:srgbClr val="1F6FEB"/>
                 </a:solidFill>
+                <a:latin typeface="微软雅黑"/>
+                <a:ea typeface="微软雅黑"/>
               </a:rPr>
-              <a:t>Adaptive speculation gives each request its own verification length K_i, so the target model only verifies tokens worth verifying. That saves compute in theory.</a:t>
+              <a:t>建议:先量化“动态分配到底少算多少 target token”,再决定是否啃图路径。</a:t>
             </a:r>
           </a:p>
           <a:p>
             <a:pPr algn="l">
               <a:spcBef>
-                <a:spcPts val="1200"/>
+                <a:spcPts val="800"/>
               </a:spcBef>
               <a:spcAft>
                 <a:spcPts val="0"/>
               </a:spcAft>
             </a:pPr>
             <a:r>
-              <a:rPr sz="1700" b="0" i="0">
-                <a:solidFill>
-                  <a:srgbClr val="1B222E"/>
-                </a:solidFill>
-              </a:rPr>
-              <a:t>Device graphs want the opposite: fixed shapes, fixed addresses, a stable execution path.</a:t>
-            </a:r>
-          </a:p>
-          <a:p>
-            <a:pPr algn="l">
-              <a:spcBef>
-                <a:spcPts val="1200"/>
-              </a:spcBef>
-              <a:spcAft>
-                <a:spcPts val="0"/>
-              </a:spcAft>
-            </a:pPr>
-            <a:r>
-              <a:rPr sz="1700" b="0" i="0">
-                <a:solidFill>
-                  <a:srgbClr val="1B222E"/>
-                </a:solidFill>
-              </a:rPr>
-              <a:t>So the question is not “does adaptive speculation reduce target tokens” — it does. It is:</a:t>
-            </a:r>
-          </a:p>
-          <a:p>
-            <a:pPr algn="l">
-              <a:spcBef>
-                <a:spcPts val="1000"/>
-              </a:spcBef>
-              <a:spcAft>
-                <a:spcPts val="0"/>
-              </a:spcAft>
-            </a:pPr>
-            <a:r>
-              <a:rPr sz="1800" b="1" i="0">
-                <a:solidFill>
-                  <a:srgbClr val="1F6FEB"/>
-                </a:solidFill>
-              </a:rPr>
-              <a:t>Do the graph updates, workspace queries, tiling, host metadata and padding needed to make per-round K_i fit a device graph cost more than the compute they save?</a:t>
-            </a:r>
-          </a:p>
-          <a:p>
-            <a:pPr algn="l">
-              <a:spcBef>
-                <a:spcPts val="1800"/>
-              </a:spcBef>
-              <a:spcAft>
-                <a:spcPts val="0"/>
-              </a:spcAft>
-            </a:pPr>
-            <a:r>
-              <a:rPr sz="1400" b="0" i="0">
+              <a:rPr sz="1350" b="0">
                 <a:solidFill>
                   <a:srgbClr val="5B6677"/>
                 </a:solidFill>
+                <a:latin typeface="微软雅黑"/>
+                <a:ea typeface="微软雅黑"/>
               </a:rPr>
-              <a:t>This memo answers three sub-questions from the source: (1) what PR #48692 actually delivers, (2) whether device-side query lengths are possible on Ascend, (3) what remains to be adapted.</a:t>
+              <a:t>GPU 侧原型在 8B 上做,verify 本来就便宜、压根没证明收益;收益随 target 变贵而放大 —— 大 MoE target 才是值得做的场景。</a:t>
             </a:r>
           </a:p>
         </p:txBody>
@@ -3457,8 +3942,8 @@
         </p:nvSpPr>
         <p:spPr>
           <a:xfrm>
-            <a:off x="566928" y="384048"/>
-            <a:ext cx="11064240" cy="914400"/>
+            <a:off x="502920" y="274320"/>
+            <a:ext cx="11247120" cy="868680"/>
           </a:xfrm>
           <a:prstGeom prst="rect">
             <a:avLst/>
@@ -3480,30 +3965,34 @@
               </a:spcAft>
             </a:pPr>
             <a:r>
-              <a:rPr sz="2800" b="1" i="0">
+              <a:rPr sz="2500" b="1">
                 <a:solidFill>
                   <a:srgbClr val="1B222E"/>
                 </a:solidFill>
+                <a:latin typeface="微软雅黑"/>
+                <a:ea typeface="微软雅黑"/>
               </a:rPr>
-              <a:t>Finding 1 — PR #48692 is narrower than assumed</a:t>
+              <a:t>① GPU 参考:PR #48692 到底交付了什么</a:t>
             </a:r>
           </a:p>
           <a:p>
             <a:pPr algn="l">
               <a:spcBef>
-                <a:spcPts val="400"/>
+                <a:spcPts val="300"/>
               </a:spcBef>
               <a:spcAft>
                 <a:spcPts val="0"/>
               </a:spcAft>
             </a:pPr>
             <a:r>
-              <a:rPr sz="1350" b="0" i="0">
+              <a:rPr sz="1200" b="0">
                 <a:solidFill>
                   <a:srgbClr val="5B6677"/>
                 </a:solidFill>
+                <a:latin typeface="微软雅黑"/>
+                <a:ea typeface="微软雅黑"/>
               </a:rPr>
-              <a:t>vLLM main · [MRV2][Spec Decode] Adaptive Speculative Decoding · closed, not merged</a:t>
+              <a:t>vLLM main · [MRV2][Spec Decode] Adaptive Speculative Decoding · closed / needs-rebase · 28 文件 +1240/−110</a:t>
             </a:r>
           </a:p>
         </p:txBody>
@@ -3516,8 +4005,8 @@
         </p:nvSpPr>
         <p:spPr>
           <a:xfrm>
-            <a:off x="566928" y="1298448"/>
-            <a:ext cx="1371600" cy="26000"/>
+            <a:off x="502920" y="1115568"/>
+            <a:ext cx="1188720" cy="24000"/>
           </a:xfrm>
           <a:prstGeom prst="rect">
             <a:avLst/>
@@ -3561,8 +4050,8 @@
           <p:nvPr/>
         </p:nvGraphicFramePr>
         <p:xfrm>
-          <a:off x="566928" y="1645920"/>
-          <a:ext cx="11064238" cy="2834640"/>
+          <a:off x="502920" y="1572768"/>
+          <a:ext cx="11247120" cy="2194560"/>
         </p:xfrm>
         <a:graphic>
           <a:graphicData uri="http://schemas.openxmlformats.org/drawingml/2006/table">
@@ -3571,27 +4060,37 @@
                 <a:tableStyleId>{5C22544A-7EE6-4342-B048-85BDC9FD1C3A}</a:tableStyleId>
               </a:tblPr>
               <a:tblGrid>
-                <a:gridCol w="1880920"/>
-                <a:gridCol w="3429914"/>
-                <a:gridCol w="5753404"/>
+                <a:gridCol w="1687068"/>
+                <a:gridCol w="3374136"/>
+                <a:gridCol w="6185916"/>
               </a:tblGrid>
-              <a:tr h="566928">
-                <a:tc>
-                  <a:txBody>
-                    <a:bodyPr wrap="square"/>
-                    <a:lstStyle/>
-                    <a:p>
-                      <a:r>
-                        <a:rPr sz="1250" b="1">
-                          <a:solidFill>
-                            <a:srgbClr val="1B222E"/>
-                          </a:solidFill>
+              <a:tr h="548640">
+                <a:tc>
+                  <a:txBody>
+                    <a:bodyPr wrap="square"/>
+                    <a:lstStyle/>
+                    <a:p>
+                      <a:pPr>
+                        <a:spcBef>
+                          <a:spcPts val="0"/>
+                        </a:spcBef>
+                        <a:spcAft>
+                          <a:spcPts val="0"/>
+                        </a:spcAft>
+                      </a:pPr>
+                      <a:r>
+                        <a:rPr sz="1150" b="1">
+                          <a:solidFill>
+                            <a:srgbClr val="1B222E"/>
+                          </a:solidFill>
+                          <a:latin typeface="微软雅黑"/>
+                          <a:ea typeface="微软雅黑"/>
                         </a:rPr>
                         <a:t/>
                       </a:r>
                     </a:p>
                   </a:txBody>
-                  <a:tcPr marL="73152" marR="54864" marT="27432" marB="27432">
+                  <a:tcPr marL="64008" marR="64008" marT="18288" marB="18288">
                     <a:solidFill>
                       <a:srgbClr val="F2F5F9"/>
                     </a:solidFill>
@@ -3602,17 +4101,27 @@
                     <a:bodyPr wrap="square"/>
                     <a:lstStyle/>
                     <a:p>
-                      <a:r>
-                        <a:rPr sz="1250" b="1">
-                          <a:solidFill>
-                            <a:srgbClr val="1B222E"/>
-                          </a:solidFill>
-                        </a:rPr>
-                        <a:t>Common assumption</a:t>
-                      </a:r>
-                    </a:p>
-                  </a:txBody>
-                  <a:tcPr marL="73152" marR="54864" marT="27432" marB="27432">
+                      <a:pPr>
+                        <a:spcBef>
+                          <a:spcPts val="0"/>
+                        </a:spcBef>
+                        <a:spcAft>
+                          <a:spcPts val="0"/>
+                        </a:spcAft>
+                      </a:pPr>
+                      <a:r>
+                        <a:rPr sz="1150" b="1">
+                          <a:solidFill>
+                            <a:srgbClr val="1B222E"/>
+                          </a:solidFill>
+                          <a:latin typeface="微软雅黑"/>
+                          <a:ea typeface="微软雅黑"/>
+                        </a:rPr>
+                        <a:t>通常的理解</a:t>
+                      </a:r>
+                    </a:p>
+                  </a:txBody>
+                  <a:tcPr marL="64008" marR="64008" marT="18288" marB="18288">
                     <a:solidFill>
                       <a:srgbClr val="F2F5F9"/>
                     </a:solidFill>
@@ -3623,40 +4132,60 @@
                     <a:bodyPr wrap="square"/>
                     <a:lstStyle/>
                     <a:p>
-                      <a:r>
-                        <a:rPr sz="1250" b="1">
-                          <a:solidFill>
-                            <a:srgbClr val="1B222E"/>
-                          </a:solidFill>
-                        </a:rPr>
-                        <a:t>What the PR states</a:t>
-                      </a:r>
-                    </a:p>
-                  </a:txBody>
-                  <a:tcPr marL="73152" marR="54864" marT="27432" marB="27432">
+                      <a:pPr>
+                        <a:spcBef>
+                          <a:spcPts val="0"/>
+                        </a:spcBef>
+                        <a:spcAft>
+                          <a:spcPts val="0"/>
+                        </a:spcAft>
+                      </a:pPr>
+                      <a:r>
+                        <a:rPr sz="1150" b="1">
+                          <a:solidFill>
+                            <a:srgbClr val="1B222E"/>
+                          </a:solidFill>
+                          <a:latin typeface="微软雅黑"/>
+                          <a:ea typeface="微软雅黑"/>
+                        </a:rPr>
+                        <a:t>PR 实际写的</a:t>
+                      </a:r>
+                    </a:p>
+                  </a:txBody>
+                  <a:tcPr marL="64008" marR="64008" marT="18288" marB="18288">
                     <a:solidFill>
                       <a:srgbClr val="F2F5F9"/>
                     </a:solidFill>
                   </a:tcPr>
                 </a:tc>
               </a:tr>
-              <a:tr h="566928">
-                <a:tc>
-                  <a:txBody>
-                    <a:bodyPr wrap="square"/>
-                    <a:lstStyle/>
-                    <a:p>
-                      <a:r>
-                        <a:rPr sz="1250" b="0">
-                          <a:solidFill>
-                            <a:srgbClr val="1B222E"/>
-                          </a:solidFill>
-                        </a:rPr>
-                        <a:t>Verification budget</a:t>
-                      </a:r>
-                    </a:p>
-                  </a:txBody>
-                  <a:tcPr marL="73152" marR="54864" marT="27432" marB="27432">
+              <a:tr h="548640">
+                <a:tc>
+                  <a:txBody>
+                    <a:bodyPr wrap="square"/>
+                    <a:lstStyle/>
+                    <a:p>
+                      <a:pPr>
+                        <a:spcBef>
+                          <a:spcPts val="0"/>
+                        </a:spcBef>
+                        <a:spcAft>
+                          <a:spcPts val="0"/>
+                        </a:spcAft>
+                      </a:pPr>
+                      <a:r>
+                        <a:rPr sz="1150" b="0">
+                          <a:solidFill>
+                            <a:srgbClr val="1B222E"/>
+                          </a:solidFill>
+                          <a:latin typeface="微软雅黑"/>
+                          <a:ea typeface="微软雅黑"/>
+                        </a:rPr>
+                        <a:t>验证预算</a:t>
+                      </a:r>
+                    </a:p>
+                  </a:txBody>
+                  <a:tcPr marL="64008" marR="64008" marT="18288" marB="18288">
                     <a:solidFill>
                       <a:srgbClr val="FFFFFF"/>
                     </a:solidFill>
@@ -3667,17 +4196,27 @@
                     <a:bodyPr wrap="square"/>
                     <a:lstStyle/>
                     <a:p>
-                      <a:r>
-                        <a:rPr sz="1250" b="0">
-                          <a:solidFill>
-                            <a:srgbClr val="1B222E"/>
-                          </a:solidFill>
-                        </a:rPr>
-                        <a:t>Allocated online from confidence head</a:t>
-                      </a:r>
-                    </a:p>
-                  </a:txBody>
-                  <a:tcPr marL="73152" marR="54864" marT="27432" marB="27432">
+                      <a:pPr>
+                        <a:spcBef>
+                          <a:spcPts val="0"/>
+                        </a:spcBef>
+                        <a:spcAft>
+                          <a:spcPts val="0"/>
+                        </a:spcAft>
+                      </a:pPr>
+                      <a:r>
+                        <a:rPr sz="1150" b="0">
+                          <a:solidFill>
+                            <a:srgbClr val="1B222E"/>
+                          </a:solidFill>
+                          <a:latin typeface="微软雅黑"/>
+                          <a:ea typeface="微软雅黑"/>
+                        </a:rPr>
+                        <a:t>confidence head 在线分配</a:t>
+                      </a:r>
+                    </a:p>
+                  </a:txBody>
+                  <a:tcPr marL="64008" marR="64008" marT="18288" marB="18288">
                     <a:solidFill>
                       <a:srgbClr val="FFFFFF"/>
                     </a:solidFill>
@@ -3688,41 +4227,80 @@
                     <a:bodyPr wrap="square"/>
                     <a:lstStyle/>
                     <a:p>
-                      <a:r>
-                        <a:rPr sz="1250" b="0">
-                          <a:solidFill>
-                            <a:srgbClr val="1B222E"/>
-                          </a:solidFill>
-                        </a:rPr>
-                        <a:t>Explicitly NOT implemented — a user-provided
- num_speculative_tokens_per_batch_size is used</a:t>
-                      </a:r>
-                    </a:p>
-                  </a:txBody>
-                  <a:tcPr marL="73152" marR="54864" marT="27432" marB="27432">
+                      <a:pPr>
+                        <a:spcBef>
+                          <a:spcPts val="0"/>
+                        </a:spcBef>
+                        <a:spcAft>
+                          <a:spcPts val="0"/>
+                        </a:spcAft>
+                      </a:pPr>
+                      <a:r>
+                        <a:rPr sz="1150" b="0">
+                          <a:solidFill>
+                            <a:srgbClr val="1B222E"/>
+                          </a:solidFill>
+                          <a:latin typeface="微软雅黑"/>
+                          <a:ea typeface="微软雅黑"/>
+                        </a:rPr>
+                        <a:t>明确不实现;改用用户配置的</a:t>
+                      </a:r>
+                    </a:p>
+                    <a:p>
+                      <a:pPr>
+                        <a:spcBef>
+                          <a:spcPts val="0"/>
+                        </a:spcBef>
+                        <a:spcAft>
+                          <a:spcPts val="0"/>
+                        </a:spcAft>
+                      </a:pPr>
+                      <a:r>
+                        <a:rPr sz="1150" b="0">
+                          <a:solidFill>
+                            <a:srgbClr val="1B222E"/>
+                          </a:solidFill>
+                          <a:latin typeface="微软雅黑"/>
+                          <a:ea typeface="微软雅黑"/>
+                        </a:rPr>
+                        <a:t>num_speculative_tokens_per_batch_size</a:t>
+                      </a:r>
+                    </a:p>
+                  </a:txBody>
+                  <a:tcPr marL="64008" marR="64008" marT="18288" marB="18288">
                     <a:solidFill>
                       <a:srgbClr val="FFFFFF"/>
                     </a:solidFill>
                   </a:tcPr>
                 </a:tc>
               </a:tr>
-              <a:tr h="566928">
-                <a:tc>
-                  <a:txBody>
-                    <a:bodyPr wrap="square"/>
-                    <a:lstStyle/>
-                    <a:p>
-                      <a:r>
-                        <a:rPr sz="1250" b="0">
-                          <a:solidFill>
-                            <a:srgbClr val="1B222E"/>
-                          </a:solidFill>
-                        </a:rPr>
-                        <a:t>Speedup</a:t>
-                      </a:r>
-                    </a:p>
-                  </a:txBody>
-                  <a:tcPr marL="73152" marR="54864" marT="27432" marB="27432">
+              <a:tr h="548640">
+                <a:tc>
+                  <a:txBody>
+                    <a:bodyPr wrap="square"/>
+                    <a:lstStyle/>
+                    <a:p>
+                      <a:pPr>
+                        <a:spcBef>
+                          <a:spcPts val="0"/>
+                        </a:spcBef>
+                        <a:spcAft>
+                          <a:spcPts val="0"/>
+                        </a:spcAft>
+                      </a:pPr>
+                      <a:r>
+                        <a:rPr sz="1150" b="0">
+                          <a:solidFill>
+                            <a:srgbClr val="1B222E"/>
+                          </a:solidFill>
+                          <a:latin typeface="微软雅黑"/>
+                          <a:ea typeface="微软雅黑"/>
+                        </a:rPr>
+                        <a:t>加速</a:t>
+                      </a:r>
+                    </a:p>
+                  </a:txBody>
+                  <a:tcPr marL="64008" marR="64008" marT="18288" marB="18288">
                     <a:solidFill>
                       <a:srgbClr val="FFFFFF"/>
                     </a:solidFill>
@@ -3733,17 +4311,27 @@
                     <a:bodyPr wrap="square"/>
                     <a:lstStyle/>
                     <a:p>
-                      <a:r>
-                        <a:rPr sz="1250" b="0">
-                          <a:solidFill>
-                            <a:srgbClr val="1B222E"/>
-                          </a:solidFill>
-                        </a:rPr>
-                        <a:t>Demonstrated</a:t>
-                      </a:r>
-                    </a:p>
-                  </a:txBody>
-                  <a:tcPr marL="73152" marR="54864" marT="27432" marB="27432">
+                      <a:pPr>
+                        <a:spcBef>
+                          <a:spcPts val="0"/>
+                        </a:spcBef>
+                        <a:spcAft>
+                          <a:spcPts val="0"/>
+                        </a:spcAft>
+                      </a:pPr>
+                      <a:r>
+                        <a:rPr sz="1150" b="0">
+                          <a:solidFill>
+                            <a:srgbClr val="1B222E"/>
+                          </a:solidFill>
+                          <a:latin typeface="微软雅黑"/>
+                          <a:ea typeface="微软雅黑"/>
+                        </a:rPr>
+                        <a:t>已验证</a:t>
+                      </a:r>
+                    </a:p>
+                  </a:txBody>
+                  <a:tcPr marL="64008" marR="64008" marT="18288" marB="18288">
                     <a:solidFill>
                       <a:srgbClr val="FFFFFF"/>
                     </a:solidFill>
@@ -3754,41 +4342,80 @@
                     <a:bodyPr wrap="square"/>
                     <a:lstStyle/>
                     <a:p>
-                      <a:r>
-                        <a:rPr sz="1250" b="0">
-                          <a:solidFill>
-                            <a:srgbClr val="1B222E"/>
-                          </a:solidFill>
-                        </a:rPr>
-                        <a:t>“no significant speedup is measurable;
- that is not the objective”</a:t>
-                      </a:r>
-                    </a:p>
-                  </a:txBody>
-                  <a:tcPr marL="73152" marR="54864" marT="27432" marB="27432">
+                      <a:pPr>
+                        <a:spcBef>
+                          <a:spcPts val="0"/>
+                        </a:spcBef>
+                        <a:spcAft>
+                          <a:spcPts val="0"/>
+                        </a:spcAft>
+                      </a:pPr>
+                      <a:r>
+                        <a:rPr sz="1150" b="0">
+                          <a:solidFill>
+                            <a:srgbClr val="1B222E"/>
+                          </a:solidFill>
+                          <a:latin typeface="微软雅黑"/>
+                          <a:ea typeface="微软雅黑"/>
+                        </a:rPr>
+                        <a:t>“no significant speedup is measurable;</a:t>
+                      </a:r>
+                    </a:p>
+                    <a:p>
+                      <a:pPr>
+                        <a:spcBef>
+                          <a:spcPts val="0"/>
+                        </a:spcBef>
+                        <a:spcAft>
+                          <a:spcPts val="0"/>
+                        </a:spcAft>
+                      </a:pPr>
+                      <a:r>
+                        <a:rPr sz="1150" b="0">
+                          <a:solidFill>
+                            <a:srgbClr val="1B222E"/>
+                          </a:solidFill>
+                          <a:latin typeface="微软雅黑"/>
+                          <a:ea typeface="微软雅黑"/>
+                        </a:rPr>
+                        <a:t>that is not the objective”</a:t>
+                      </a:r>
+                    </a:p>
+                  </a:txBody>
+                  <a:tcPr marL="64008" marR="64008" marT="18288" marB="18288">
                     <a:solidFill>
                       <a:srgbClr val="FFFFFF"/>
                     </a:solidFill>
                   </a:tcPr>
                 </a:tc>
               </a:tr>
-              <a:tr h="566928">
-                <a:tc>
-                  <a:txBody>
-                    <a:bodyPr wrap="square"/>
-                    <a:lstStyle/>
-                    <a:p>
-                      <a:r>
-                        <a:rPr sz="1250" b="0">
-                          <a:solidFill>
-                            <a:srgbClr val="1B222E"/>
-                          </a:solidFill>
-                        </a:rPr>
-                        <a:t>Backends</a:t>
-                      </a:r>
-                    </a:p>
-                  </a:txBody>
-                  <a:tcPr marL="73152" marR="54864" marT="27432" marB="27432">
+              <a:tr h="548640">
+                <a:tc>
+                  <a:txBody>
+                    <a:bodyPr wrap="square"/>
+                    <a:lstStyle/>
+                    <a:p>
+                      <a:pPr>
+                        <a:spcBef>
+                          <a:spcPts val="0"/>
+                        </a:spcBef>
+                        <a:spcAft>
+                          <a:spcPts val="0"/>
+                        </a:spcAft>
+                      </a:pPr>
+                      <a:r>
+                        <a:rPr sz="1150" b="0">
+                          <a:solidFill>
+                            <a:srgbClr val="1B222E"/>
+                          </a:solidFill>
+                          <a:latin typeface="微软雅黑"/>
+                          <a:ea typeface="微软雅黑"/>
+                        </a:rPr>
+                        <a:t>后端</a:t>
+                      </a:r>
+                    </a:p>
+                  </a:txBody>
+                  <a:tcPr marL="64008" marR="64008" marT="18288" marB="18288">
                     <a:solidFill>
                       <a:srgbClr val="FFFFFF"/>
                     </a:solidFill>
@@ -3799,17 +4426,27 @@
                     <a:bodyPr wrap="square"/>
                     <a:lstStyle/>
                     <a:p>
-                      <a:r>
-                        <a:rPr sz="1250" b="0">
-                          <a:solidFill>
-                            <a:srgbClr val="1B222E"/>
-                          </a:solidFill>
-                        </a:rPr>
-                        <a:t>General</a:t>
-                      </a:r>
-                    </a:p>
-                  </a:txBody>
-                  <a:tcPr marL="73152" marR="54864" marT="27432" marB="27432">
+                      <a:pPr>
+                        <a:spcBef>
+                          <a:spcPts val="0"/>
+                        </a:spcBef>
+                        <a:spcAft>
+                          <a:spcPts val="0"/>
+                        </a:spcAft>
+                      </a:pPr>
+                      <a:r>
+                        <a:rPr sz="1150" b="0">
+                          <a:solidFill>
+                            <a:srgbClr val="1B222E"/>
+                          </a:solidFill>
+                          <a:latin typeface="微软雅黑"/>
+                          <a:ea typeface="微软雅黑"/>
+                        </a:rPr>
+                        <a:t>通用</a:t>
+                      </a:r>
+                    </a:p>
+                  </a:txBody>
+                  <a:tcPr marL="64008" marR="64008" marT="18288" marB="18288">
                     <a:solidFill>
                       <a:srgbClr val="FFFFFF"/>
                     </a:solidFill>
@@ -3820,82 +4457,27 @@
                     <a:bodyPr wrap="square"/>
                     <a:lstStyle/>
                     <a:p>
-                      <a:r>
-                        <a:rPr sz="1250" b="0">
-                          <a:solidFill>
-                            <a:srgbClr val="1B222E"/>
-                          </a:solidFill>
-                        </a:rPr>
-                        <a:t>FLASH_ATTENTION only</a:t>
-                      </a:r>
-                    </a:p>
-                  </a:txBody>
-                  <a:tcPr marL="73152" marR="54864" marT="27432" marB="27432">
-                    <a:solidFill>
-                      <a:srgbClr val="FFFFFF"/>
-                    </a:solidFill>
-                  </a:tcPr>
-                </a:tc>
-              </a:tr>
-              <a:tr h="566928">
-                <a:tc>
-                  <a:txBody>
-                    <a:bodyPr wrap="square"/>
-                    <a:lstStyle/>
-                    <a:p>
-                      <a:r>
-                        <a:rPr sz="1250" b="0">
-                          <a:solidFill>
-                            <a:srgbClr val="1B222E"/>
-                          </a:solidFill>
-                        </a:rPr>
-                        <a:t>Status</a:t>
-                      </a:r>
-                    </a:p>
-                  </a:txBody>
-                  <a:tcPr marL="73152" marR="54864" marT="27432" marB="27432">
-                    <a:solidFill>
-                      <a:srgbClr val="FFFFFF"/>
-                    </a:solidFill>
-                  </a:tcPr>
-                </a:tc>
-                <a:tc>
-                  <a:txBody>
-                    <a:bodyPr wrap="square"/>
-                    <a:lstStyle/>
-                    <a:p>
-                      <a:r>
-                        <a:rPr sz="1250" b="0">
-                          <a:solidFill>
-                            <a:srgbClr val="1B222E"/>
-                          </a:solidFill>
-                        </a:rPr>
-                        <a:t>In flight</a:t>
-                      </a:r>
-                    </a:p>
-                  </a:txBody>
-                  <a:tcPr marL="73152" marR="54864" marT="27432" marB="27432">
-                    <a:solidFill>
-                      <a:srgbClr val="FFFFFF"/>
-                    </a:solidFill>
-                  </a:tcPr>
-                </a:tc>
-                <a:tc>
-                  <a:txBody>
-                    <a:bodyPr wrap="square"/>
-                    <a:lstStyle/>
-                    <a:p>
-                      <a:r>
-                        <a:rPr sz="1250" b="0">
-                          <a:solidFill>
-                            <a:srgbClr val="1B222E"/>
-                          </a:solidFill>
-                        </a:rPr>
-                        <a:t>Closed, needs-rebase · 28 files, +1240/−110</a:t>
-                      </a:r>
-                    </a:p>
-                  </a:txBody>
-                  <a:tcPr marL="73152" marR="54864" marT="27432" marB="27432">
+                      <a:pPr>
+                        <a:spcBef>
+                          <a:spcPts val="0"/>
+                        </a:spcBef>
+                        <a:spcAft>
+                          <a:spcPts val="0"/>
+                        </a:spcAft>
+                      </a:pPr>
+                      <a:r>
+                        <a:rPr sz="1150" b="0">
+                          <a:solidFill>
+                            <a:srgbClr val="1B222E"/>
+                          </a:solidFill>
+                          <a:latin typeface="微软雅黑"/>
+                          <a:ea typeface="微软雅黑"/>
+                        </a:rPr>
+                        <a:t>仅 FLASH_ATTENTION 可用</a:t>
+                      </a:r>
+                    </a:p>
+                  </a:txBody>
+                  <a:tcPr marL="64008" marR="64008" marT="18288" marB="18288">
                     <a:solidFill>
                       <a:srgbClr val="FFFFFF"/>
                     </a:solidFill>
@@ -3914,8 +4496,8 @@
         </p:nvSpPr>
         <p:spPr>
           <a:xfrm>
-            <a:off x="566928" y="4846320"/>
-            <a:ext cx="11064240" cy="1463040"/>
+            <a:off x="502920" y="3429000"/>
+            <a:ext cx="11247120" cy="1097280"/>
           </a:xfrm>
           <a:prstGeom prst="rect">
             <a:avLst/>
@@ -3937,48 +4519,337 @@
               </a:spcAft>
             </a:pPr>
             <a:r>
-              <a:rPr sz="1500" b="0" i="0">
+              <a:rPr sz="1450" b="0">
                 <a:solidFill>
                   <a:srgbClr val="1B222E"/>
                 </a:solidFill>
+                <a:latin typeface="微软雅黑"/>
+                <a:ea typeface="微软雅黑"/>
               </a:rPr>
-              <a:t>What it does deliver: variable-length per-request speculation that stays FULL-CUDA-Graph compatible — attention-metadata flags for variable-length decode, structured outputs, logprobs, mixed prefill/decode.</a:t>
-            </a:r>
-          </a:p>
+              <a:t>它真正交付的:变长 per-request 投机与 FULL CUDA Graph 共存 —— attention metadata 的变长兼容标志、structured outputs、logprobs、prefill/decode 混合 batch。</a:t>
+            </a:r>
+          </a:p>
+        </p:txBody>
+      </p:sp>
+      <p:graphicFrame>
+        <p:nvGraphicFramePr>
+          <p:cNvPr id="6" name="Table 5"/>
+          <p:cNvGraphicFramePr>
+            <a:graphicFrameLocks noGrp="1"/>
+          </p:cNvGraphicFramePr>
+          <p:nvPr/>
+        </p:nvGraphicFramePr>
+        <p:xfrm>
+          <a:off x="502920" y="4617720"/>
+          <a:ext cx="7863837" cy="621792"/>
+        </p:xfrm>
+        <a:graphic>
+          <a:graphicData uri="http://schemas.openxmlformats.org/drawingml/2006/table">
+            <a:tbl>
+              <a:tblPr firstRow="1" bandRow="1">
+                <a:tableStyleId>{5C22544A-7EE6-4342-B048-85BDC9FD1C3A}</a:tableStyleId>
+              </a:tblPr>
+              <a:tblGrid>
+                <a:gridCol w="2673705"/>
+                <a:gridCol w="1730044"/>
+                <a:gridCol w="1730044"/>
+                <a:gridCol w="1730044"/>
+              </a:tblGrid>
+              <a:tr h="310896">
+                <a:tc>
+                  <a:txBody>
+                    <a:bodyPr wrap="square"/>
+                    <a:lstStyle/>
+                    <a:p>
+                      <a:pPr>
+                        <a:spcBef>
+                          <a:spcPts val="0"/>
+                        </a:spcBef>
+                        <a:spcAft>
+                          <a:spcPts val="0"/>
+                        </a:spcAft>
+                      </a:pPr>
+                      <a:r>
+                        <a:rPr sz="1150" b="1">
+                          <a:solidFill>
+                            <a:srgbClr val="1B222E"/>
+                          </a:solidFill>
+                          <a:latin typeface="微软雅黑"/>
+                          <a:ea typeface="微软雅黑"/>
+                        </a:rPr>
+                        <a:t>SPEED-Bench 平均接受长度</a:t>
+                      </a:r>
+                    </a:p>
+                  </a:txBody>
+                  <a:tcPr marL="64008" marR="64008" marT="18288" marB="18288">
+                    <a:solidFill>
+                      <a:srgbClr val="F2F5F9"/>
+                    </a:solidFill>
+                  </a:tcPr>
+                </a:tc>
+                <a:tc>
+                  <a:txBody>
+                    <a:bodyPr wrap="square"/>
+                    <a:lstStyle/>
+                    <a:p>
+                      <a:pPr>
+                        <a:spcBef>
+                          <a:spcPts val="0"/>
+                        </a:spcBef>
+                        <a:spcAft>
+                          <a:spcPts val="0"/>
+                        </a:spcAft>
+                      </a:pPr>
+                      <a:r>
+                        <a:rPr sz="1150" b="1">
+                          <a:solidFill>
+                            <a:srgbClr val="1B222E"/>
+                          </a:solidFill>
+                          <a:latin typeface="微软雅黑"/>
+                          <a:ea typeface="微软雅黑"/>
+                        </a:rPr>
+                        <a:t>静态 K=5</a:t>
+                      </a:r>
+                    </a:p>
+                  </a:txBody>
+                  <a:tcPr marL="64008" marR="64008" marT="18288" marB="18288">
+                    <a:solidFill>
+                      <a:srgbClr val="F2F5F9"/>
+                    </a:solidFill>
+                  </a:tcPr>
+                </a:tc>
+                <a:tc>
+                  <a:txBody>
+                    <a:bodyPr wrap="square"/>
+                    <a:lstStyle/>
+                    <a:p>
+                      <a:pPr>
+                        <a:spcBef>
+                          <a:spcPts val="0"/>
+                        </a:spcBef>
+                        <a:spcAft>
+                          <a:spcPts val="0"/>
+                        </a:spcAft>
+                      </a:pPr>
+                      <a:r>
+                        <a:rPr sz="1150" b="1">
+                          <a:solidFill>
+                            <a:srgbClr val="1B222E"/>
+                          </a:solidFill>
+                          <a:latin typeface="微软雅黑"/>
+                          <a:ea typeface="微软雅黑"/>
+                        </a:rPr>
+                        <a:t>静态 K=7</a:t>
+                      </a:r>
+                    </a:p>
+                  </a:txBody>
+                  <a:tcPr marL="64008" marR="64008" marT="18288" marB="18288">
+                    <a:solidFill>
+                      <a:srgbClr val="F2F5F9"/>
+                    </a:solidFill>
+                  </a:tcPr>
+                </a:tc>
+                <a:tc>
+                  <a:txBody>
+                    <a:bodyPr wrap="square"/>
+                    <a:lstStyle/>
+                    <a:p>
+                      <a:pPr>
+                        <a:spcBef>
+                          <a:spcPts val="0"/>
+                        </a:spcBef>
+                        <a:spcAft>
+                          <a:spcPts val="0"/>
+                        </a:spcAft>
+                      </a:pPr>
+                      <a:r>
+                        <a:rPr sz="1150" b="1">
+                          <a:solidFill>
+                            <a:srgbClr val="1B222E"/>
+                          </a:solidFill>
+                          <a:latin typeface="微软雅黑"/>
+                          <a:ea typeface="微软雅黑"/>
+                        </a:rPr>
+                        <a:t>自适应(上限7/有效5)</a:t>
+                      </a:r>
+                    </a:p>
+                  </a:txBody>
+                  <a:tcPr marL="64008" marR="64008" marT="18288" marB="18288">
+                    <a:solidFill>
+                      <a:srgbClr val="F2F5F9"/>
+                    </a:solidFill>
+                  </a:tcPr>
+                </a:tc>
+              </a:tr>
+              <a:tr h="310896">
+                <a:tc>
+                  <a:txBody>
+                    <a:bodyPr wrap="square"/>
+                    <a:lstStyle/>
+                    <a:p>
+                      <a:pPr>
+                        <a:spcBef>
+                          <a:spcPts val="0"/>
+                        </a:spcBef>
+                        <a:spcAft>
+                          <a:spcPts val="0"/>
+                        </a:spcAft>
+                      </a:pPr>
+                      <a:r>
+                        <a:rPr sz="1150" b="0">
+                          <a:solidFill>
+                            <a:srgbClr val="1B222E"/>
+                          </a:solidFill>
+                          <a:latin typeface="微软雅黑"/>
+                          <a:ea typeface="微软雅黑"/>
+                        </a:rPr>
+                        <a:t>总体</a:t>
+                      </a:r>
+                    </a:p>
+                  </a:txBody>
+                  <a:tcPr marL="64008" marR="64008" marT="18288" marB="18288">
+                    <a:solidFill>
+                      <a:srgbClr val="FFFFFF"/>
+                    </a:solidFill>
+                  </a:tcPr>
+                </a:tc>
+                <a:tc>
+                  <a:txBody>
+                    <a:bodyPr wrap="square"/>
+                    <a:lstStyle/>
+                    <a:p>
+                      <a:pPr>
+                        <a:spcBef>
+                          <a:spcPts val="0"/>
+                        </a:spcBef>
+                        <a:spcAft>
+                          <a:spcPts val="0"/>
+                        </a:spcAft>
+                      </a:pPr>
+                      <a:r>
+                        <a:rPr sz="1150" b="0">
+                          <a:solidFill>
+                            <a:srgbClr val="1B222E"/>
+                          </a:solidFill>
+                          <a:latin typeface="微软雅黑"/>
+                          <a:ea typeface="微软雅黑"/>
+                        </a:rPr>
+                        <a:t>3.445</a:t>
+                      </a:r>
+                    </a:p>
+                  </a:txBody>
+                  <a:tcPr marL="64008" marR="64008" marT="18288" marB="18288">
+                    <a:solidFill>
+                      <a:srgbClr val="FFFFFF"/>
+                    </a:solidFill>
+                  </a:tcPr>
+                </a:tc>
+                <a:tc>
+                  <a:txBody>
+                    <a:bodyPr wrap="square"/>
+                    <a:lstStyle/>
+                    <a:p>
+                      <a:pPr>
+                        <a:spcBef>
+                          <a:spcPts val="0"/>
+                        </a:spcBef>
+                        <a:spcAft>
+                          <a:spcPts val="0"/>
+                        </a:spcAft>
+                      </a:pPr>
+                      <a:r>
+                        <a:rPr sz="1150" b="0">
+                          <a:solidFill>
+                            <a:srgbClr val="1B222E"/>
+                          </a:solidFill>
+                          <a:latin typeface="微软雅黑"/>
+                          <a:ea typeface="微软雅黑"/>
+                        </a:rPr>
+                        <a:t>3.918</a:t>
+                      </a:r>
+                    </a:p>
+                  </a:txBody>
+                  <a:tcPr marL="64008" marR="64008" marT="18288" marB="18288">
+                    <a:solidFill>
+                      <a:srgbClr val="FFFFFF"/>
+                    </a:solidFill>
+                  </a:tcPr>
+                </a:tc>
+                <a:tc>
+                  <a:txBody>
+                    <a:bodyPr wrap="square"/>
+                    <a:lstStyle/>
+                    <a:p>
+                      <a:pPr>
+                        <a:spcBef>
+                          <a:spcPts val="0"/>
+                        </a:spcBef>
+                        <a:spcAft>
+                          <a:spcPts val="0"/>
+                        </a:spcAft>
+                      </a:pPr>
+                      <a:r>
+                        <a:rPr sz="1150" b="0">
+                          <a:solidFill>
+                            <a:srgbClr val="1B222E"/>
+                          </a:solidFill>
+                          <a:latin typeface="微软雅黑"/>
+                          <a:ea typeface="微软雅黑"/>
+                        </a:rPr>
+                        <a:t>3.707</a:t>
+                      </a:r>
+                    </a:p>
+                  </a:txBody>
+                  <a:tcPr marL="64008" marR="64008" marT="18288" marB="18288">
+                    <a:solidFill>
+                      <a:srgbClr val="FFFFFF"/>
+                    </a:solidFill>
+                  </a:tcPr>
+                </a:tc>
+              </a:tr>
+            </a:tbl>
+          </a:graphicData>
+        </a:graphic>
+      </p:graphicFrame>
+      <p:sp>
+        <p:nvSpPr>
+          <p:cNvPr id="7" name="TextBox 6"/>
+          <p:cNvSpPr txBox="1"/>
+          <p:nvPr/>
+        </p:nvSpPr>
+        <p:spPr>
+          <a:xfrm>
+            <a:off x="502920" y="5440680"/>
+            <a:ext cx="11247120" cy="914400"/>
+          </a:xfrm>
+          <a:prstGeom prst="rect">
+            <a:avLst/>
+          </a:prstGeom>
+          <a:noFill/>
+        </p:spPr>
+        <p:txBody>
+          <a:bodyPr wrap="square">
+            <a:spAutoFit/>
+          </a:bodyPr>
+          <a:lstStyle/>
           <a:p>
             <a:pPr algn="l">
               <a:spcBef>
-                <a:spcPts val="800"/>
+                <a:spcPts val="0"/>
               </a:spcBef>
               <a:spcAft>
                 <a:spcPts val="0"/>
               </a:spcAft>
             </a:pPr>
             <a:r>
-              <a:rPr sz="1500" b="0" i="0">
-                <a:solidFill>
-                  <a:srgbClr val="1B222E"/>
-                </a:solidFill>
-              </a:rPr>
-              <a:t>Measured benefit is acceptance rate, not latency: adaptive at an effective K=5 budget reaches 3.71 against 3.45 for static K=5 and 3.92 for static K=7 (SPEED-Bench average).</a:t>
-            </a:r>
-          </a:p>
-          <a:p>
-            <a:pPr algn="l">
-              <a:spcBef>
-                <a:spcPts val="1000"/>
-              </a:spcBef>
-              <a:spcAft>
-                <a:spcPts val="0"/>
-              </a:spcAft>
-            </a:pPr>
-            <a:r>
-              <a:rPr sz="1500" b="1" i="0">
+              <a:rPr sz="1450" b="1">
                 <a:solidFill>
                   <a:srgbClr val="1F6FEB"/>
                 </a:solidFill>
+                <a:latin typeface="微软雅黑"/>
+                <a:ea typeface="微软雅黑"/>
               </a:rPr>
-              <a:t>⟹ Treat it as a reference for “how variable length coexists with a full graph”, not as evidence of speedup.</a:t>
+              <a:t>⟹ 用 K=5 的预算拿到 K=5→K=7 之间约 55% 的接受率增益。这是它唯一被证实的收益,与延迟无关。</a:t>
             </a:r>
           </a:p>
         </p:txBody>
@@ -4017,8 +4888,8 @@
         </p:nvSpPr>
         <p:spPr>
           <a:xfrm>
-            <a:off x="566928" y="384048"/>
-            <a:ext cx="11064240" cy="914400"/>
+            <a:off x="502920" y="274320"/>
+            <a:ext cx="11247120" cy="868680"/>
           </a:xfrm>
           <a:prstGeom prst="rect">
             <a:avLst/>
@@ -4040,30 +4911,34 @@
               </a:spcAft>
             </a:pPr>
             <a:r>
-              <a:rPr sz="2800" b="1" i="0">
+              <a:rPr sz="2500" b="1">
                 <a:solidFill>
                   <a:srgbClr val="1B222E"/>
                 </a:solidFill>
+                <a:latin typeface="微软雅黑"/>
+                <a:ea typeface="微软雅黑"/>
               </a:rPr>
-              <a:t>Finding 2 — device-side query lengths already exist on Ascend</a:t>
+              <a:t>② 两条算子路径的分野 —— 决定通用模型与 DSV4 难度不同</a:t>
             </a:r>
           </a:p>
           <a:p>
             <a:pPr algn="l">
               <a:spcBef>
-                <a:spcPts val="400"/>
+                <a:spcPts val="300"/>
               </a:spcBef>
               <a:spcAft>
                 <a:spcPts val="0"/>
               </a:spcAft>
             </a:pPr>
             <a:r>
-              <a:rPr sz="1350" b="0" i="0">
+              <a:rPr sz="1200" b="0">
                 <a:solidFill>
                   <a:srgbClr val="5B6677"/>
                 </a:solidFill>
+                <a:latin typeface="微软雅黑"/>
+                <a:ea typeface="微软雅黑"/>
               </a:rPr>
-              <a:t>…but only on one of the two operator families</a:t>
+              <a:t>“K_i 能否全程留在设备上”取决于走哪族算子,而不取决于硬件</a:t>
             </a:r>
           </a:p>
         </p:txBody>
@@ -4076,8 +4951,8 @@
         </p:nvSpPr>
         <p:spPr>
           <a:xfrm>
-            <a:off x="566928" y="1298448"/>
-            <a:ext cx="1371600" cy="26000"/>
+            <a:off x="502920" y="1115568"/>
+            <a:ext cx="1188720" cy="24000"/>
           </a:xfrm>
           <a:prstGeom prst="rect">
             <a:avLst/>
@@ -4121,8 +4996,8 @@
           <p:nvPr/>
         </p:nvGraphicFramePr>
         <p:xfrm>
-          <a:off x="566928" y="1645920"/>
-          <a:ext cx="11064239" cy="2606040"/>
+          <a:off x="502920" y="1572768"/>
+          <a:ext cx="11247119" cy="3291840"/>
         </p:xfrm>
         <a:graphic>
           <a:graphicData uri="http://schemas.openxmlformats.org/drawingml/2006/table">
@@ -4131,27 +5006,37 @@
                 <a:tableStyleId>{5C22544A-7EE6-4342-B048-85BDC9FD1C3A}</a:tableStyleId>
               </a:tblPr>
               <a:tblGrid>
-                <a:gridCol w="3097987"/>
-                <a:gridCol w="2655417"/>
-                <a:gridCol w="5310835"/>
+                <a:gridCol w="1799539"/>
+                <a:gridCol w="4498848"/>
+                <a:gridCol w="4948732"/>
               </a:tblGrid>
-              <a:tr h="868680">
-                <a:tc>
-                  <a:txBody>
-                    <a:bodyPr wrap="square"/>
-                    <a:lstStyle/>
-                    <a:p>
-                      <a:r>
-                        <a:rPr sz="1250" b="1">
-                          <a:solidFill>
-                            <a:srgbClr val="1B222E"/>
-                          </a:solidFill>
-                        </a:rPr>
-                        <a:t>Operator family</a:t>
-                      </a:r>
-                    </a:p>
-                  </a:txBody>
-                  <a:tcPr marL="73152" marR="54864" marT="27432" marB="27432">
+              <a:tr h="658368">
+                <a:tc>
+                  <a:txBody>
+                    <a:bodyPr wrap="square"/>
+                    <a:lstStyle/>
+                    <a:p>
+                      <a:pPr>
+                        <a:spcBef>
+                          <a:spcPts val="0"/>
+                        </a:spcBef>
+                        <a:spcAft>
+                          <a:spcPts val="0"/>
+                        </a:spcAft>
+                      </a:pPr>
+                      <a:r>
+                        <a:rPr sz="1150" b="1">
+                          <a:solidFill>
+                            <a:srgbClr val="1B222E"/>
+                          </a:solidFill>
+                          <a:latin typeface="微软雅黑"/>
+                          <a:ea typeface="微软雅黑"/>
+                        </a:rPr>
+                        <a:t/>
+                      </a:r>
+                    </a:p>
+                  </a:txBody>
+                  <a:tcPr marL="64008" marR="64008" marT="18288" marB="18288">
                     <a:solidFill>
                       <a:srgbClr val="F2F5F9"/>
                     </a:solidFill>
@@ -4162,17 +5047,47 @@
                     <a:bodyPr wrap="square"/>
                     <a:lstStyle/>
                     <a:p>
-                      <a:r>
-                        <a:rPr sz="1250" b="1">
-                          <a:solidFill>
-                            <a:srgbClr val="1B222E"/>
-                          </a:solidFill>
-                        </a:rPr>
-                        <a:t>Sequence-length contract</a:t>
-                      </a:r>
-                    </a:p>
-                  </a:txBody>
-                  <a:tcPr marL="73152" marR="54864" marT="27432" marB="27432">
+                      <a:pPr>
+                        <a:spcBef>
+                          <a:spcPts val="0"/>
+                        </a:spcBef>
+                        <a:spcAft>
+                          <a:spcPts val="0"/>
+                        </a:spcAft>
+                      </a:pPr>
+                      <a:r>
+                        <a:rPr sz="1150" b="1">
+                          <a:solidFill>
+                            <a:srgbClr val="1B222E"/>
+                          </a:solidFill>
+                          <a:latin typeface="微软雅黑"/>
+                          <a:ea typeface="微软雅黑"/>
+                        </a:rPr>
+                        <a:t>FIA v2</a:t>
+                      </a:r>
+                    </a:p>
+                    <a:p>
+                      <a:pPr>
+                        <a:spcBef>
+                          <a:spcPts val="0"/>
+                        </a:spcBef>
+                        <a:spcAft>
+                          <a:spcPts val="0"/>
+                        </a:spcAft>
+                      </a:pPr>
+                      <a:r>
+                        <a:rPr sz="1150" b="1">
+                          <a:solidFill>
+                            <a:srgbClr val="1B222E"/>
+                          </a:solidFill>
+                          <a:latin typeface="微软雅黑"/>
+                          <a:ea typeface="微软雅黑"/>
+                        </a:rPr>
+                        <a:t>npu_fused_infer_attention_score_v2</a:t>
+                      </a:r>
+                    </a:p>
+                  </a:txBody>
+                  <a:tcPr marL="64008" marR="64008" marT="18288" marB="18288">
                     <a:solidFill>
                       <a:srgbClr val="F2F5F9"/>
                     </a:solidFill>
@@ -4183,41 +5098,80 @@
                     <a:bodyPr wrap="square"/>
                     <a:lstStyle/>
                     <a:p>
-                      <a:r>
-                        <a:rPr sz="1250" b="1">
-                          <a:solidFill>
-                            <a:srgbClr val="1B222E"/>
-                          </a:solidFill>
-                        </a:rPr>
-                        <a:t>Evidence</a:t>
-                      </a:r>
-                    </a:p>
-                  </a:txBody>
-                  <a:tcPr marL="73152" marR="54864" marT="27432" marB="27432">
+                      <a:pPr>
+                        <a:spcBef>
+                          <a:spcPts val="0"/>
+                        </a:spcBef>
+                        <a:spcAft>
+                          <a:spcPts val="0"/>
+                        </a:spcAft>
+                      </a:pPr>
+                      <a:r>
+                        <a:rPr sz="1150" b="1">
+                          <a:solidFill>
+                            <a:srgbClr val="1B222E"/>
+                          </a:solidFill>
+                          <a:latin typeface="微软雅黑"/>
+                          <a:ea typeface="微软雅黑"/>
+                        </a:rPr>
+                        <a:t>DSA / lightning-indexer / SFA</a:t>
+                      </a:r>
+                    </a:p>
+                    <a:p>
+                      <a:pPr>
+                        <a:spcBef>
+                          <a:spcPts val="0"/>
+                        </a:spcBef>
+                        <a:spcAft>
+                          <a:spcPts val="0"/>
+                        </a:spcAft>
+                      </a:pPr>
+                      <a:r>
+                        <a:rPr sz="1150" b="1">
+                          <a:solidFill>
+                            <a:srgbClr val="1B222E"/>
+                          </a:solidFill>
+                          <a:latin typeface="微软雅黑"/>
+                          <a:ea typeface="微软雅黑"/>
+                        </a:rPr>
+                        <a:t>torch.ops._C_ascend.npu_vllm_*</a:t>
+                      </a:r>
+                    </a:p>
+                  </a:txBody>
+                  <a:tcPr marL="64008" marR="64008" marT="18288" marB="18288">
                     <a:solidFill>
                       <a:srgbClr val="F2F5F9"/>
                     </a:solidFill>
                   </a:tcPr>
                 </a:tc>
               </a:tr>
-              <a:tr h="868680">
-                <a:tc>
-                  <a:txBody>
-                    <a:bodyPr wrap="square"/>
-                    <a:lstStyle/>
-                    <a:p>
-                      <a:r>
-                        <a:rPr sz="1250" b="0">
-                          <a:solidFill>
-                            <a:srgbClr val="1B222E"/>
-                          </a:solidFill>
-                        </a:rPr>
-                        <a:t>FIA v2
-npu_fused_infer_attention_score_v2</a:t>
-                      </a:r>
-                    </a:p>
-                  </a:txBody>
-                  <a:tcPr marL="73152" marR="54864" marT="27432" marB="27432">
+              <a:tr h="658368">
+                <a:tc>
+                  <a:txBody>
+                    <a:bodyPr wrap="square"/>
+                    <a:lstStyle/>
+                    <a:p>
+                      <a:pPr>
+                        <a:spcBef>
+                          <a:spcPts val="0"/>
+                        </a:spcBef>
+                        <a:spcAft>
+                          <a:spcPts val="0"/>
+                        </a:spcAft>
+                      </a:pPr>
+                      <a:r>
+                        <a:rPr sz="1150" b="0">
+                          <a:solidFill>
+                            <a:srgbClr val="1B222E"/>
+                          </a:solidFill>
+                          <a:latin typeface="微软雅黑"/>
+                          <a:ea typeface="微软雅黑"/>
+                        </a:rPr>
+                        <a:t>长度契约</a:t>
+                      </a:r>
+                    </a:p>
+                  </a:txBody>
+                  <a:tcPr marL="64008" marR="64008" marT="18288" marB="18288">
                     <a:solidFill>
                       <a:srgbClr val="FFFFFF"/>
                     </a:solidFill>
@@ -4228,17 +5182,27 @@
                     <a:bodyPr wrap="square"/>
                     <a:lstStyle/>
                     <a:p>
-                      <a:r>
-                        <a:rPr sz="1250" b="0">
-                          <a:solidFill>
-                            <a:srgbClr val="1B222E"/>
-                          </a:solidFill>
-                        </a:rPr>
-                        <a:t>Host-side int array (SymInt[])</a:t>
-                      </a:r>
-                    </a:p>
-                  </a:txBody>
-                  <a:tcPr marL="73152" marR="54864" marT="27432" marB="27432">
+                      <a:pPr>
+                        <a:spcBef>
+                          <a:spcPts val="0"/>
+                        </a:spcBef>
+                        <a:spcAft>
+                          <a:spcPts val="0"/>
+                        </a:spcAft>
+                      </a:pPr>
+                      <a:r>
+                        <a:rPr sz="1150" b="0">
+                          <a:solidFill>
+                            <a:srgbClr val="1B222E"/>
+                          </a:solidFill>
+                          <a:latin typeface="微软雅黑"/>
+                          <a:ea typeface="微软雅黑"/>
+                        </a:rPr>
+                        <a:t>Host 侧 int 数组(SymInt[])</a:t>
+                      </a:r>
+                    </a:p>
+                  </a:txBody>
+                  <a:tcPr marL="64008" marR="64008" marT="18288" marB="18288">
                     <a:solidFill>
                       <a:srgbClr val="FFFFFF"/>
                     </a:solidFill>
@@ -4249,42 +5213,60 @@
                     <a:bodyPr wrap="square"/>
                     <a:lstStyle/>
                     <a:p>
-                      <a:r>
-                        <a:rPr sz="1250" b="0">
-                          <a:solidFill>
-                            <a:srgbClr val="1B222E"/>
-                          </a:solidFill>
-                        </a:rPr>
-                        <a:t>Ascend op docs; every vllm-ascend call site
- builds it with .tolist()</a:t>
-                      </a:r>
-                    </a:p>
-                  </a:txBody>
-                  <a:tcPr marL="73152" marR="54864" marT="27432" marB="27432">
+                      <a:pPr>
+                        <a:spcBef>
+                          <a:spcPts val="0"/>
+                        </a:spcBef>
+                        <a:spcAft>
+                          <a:spcPts val="0"/>
+                        </a:spcAft>
+                      </a:pPr>
+                      <a:r>
+                        <a:rPr sz="1150" b="0">
+                          <a:solidFill>
+                            <a:srgbClr val="1B222E"/>
+                          </a:solidFill>
+                          <a:latin typeface="微软雅黑"/>
+                          <a:ea typeface="微软雅黑"/>
+                        </a:rPr>
+                        <a:t>torch.Tensor(设备侧)</a:t>
+                      </a:r>
+                    </a:p>
+                  </a:txBody>
+                  <a:tcPr marL="64008" marR="64008" marT="18288" marB="18288">
                     <a:solidFill>
                       <a:srgbClr val="FFFFFF"/>
                     </a:solidFill>
                   </a:tcPr>
                 </a:tc>
               </a:tr>
-              <a:tr h="868680">
-                <a:tc>
-                  <a:txBody>
-                    <a:bodyPr wrap="square"/>
-                    <a:lstStyle/>
-                    <a:p>
-                      <a:r>
-                        <a:rPr sz="1250" b="0">
-                          <a:solidFill>
-                            <a:srgbClr val="1B222E"/>
-                          </a:solidFill>
-                        </a:rPr>
-                        <a:t>DSA / lightning indexer / SFA
-torch.ops._C_ascend.npu_vllm_*</a:t>
-                      </a:r>
-                    </a:p>
-                  </a:txBody>
-                  <a:tcPr marL="73152" marR="54864" marT="27432" marB="27432">
+              <a:tr h="658368">
+                <a:tc>
+                  <a:txBody>
+                    <a:bodyPr wrap="square"/>
+                    <a:lstStyle/>
+                    <a:p>
+                      <a:pPr>
+                        <a:spcBef>
+                          <a:spcPts val="0"/>
+                        </a:spcBef>
+                        <a:spcAft>
+                          <a:spcPts val="0"/>
+                        </a:spcAft>
+                      </a:pPr>
+                      <a:r>
+                        <a:rPr sz="1150" b="0">
+                          <a:solidFill>
+                            <a:srgbClr val="1B222E"/>
+                          </a:solidFill>
+                          <a:latin typeface="微软雅黑"/>
+                          <a:ea typeface="微软雅黑"/>
+                        </a:rPr>
+                        <a:t>代码证据</a:t>
+                      </a:r>
+                    </a:p>
+                  </a:txBody>
+                  <a:tcPr marL="64008" marR="64008" marT="18288" marB="18288">
                     <a:solidFill>
                       <a:srgbClr val="FFFFFF"/>
                     </a:solidFill>
@@ -4295,17 +5277,47 @@
                     <a:bodyPr wrap="square"/>
                     <a:lstStyle/>
                     <a:p>
-                      <a:r>
-                        <a:rPr sz="1250" b="0">
-                          <a:solidFill>
-                            <a:srgbClr val="1B222E"/>
-                          </a:solidFill>
-                        </a:rPr>
-                        <a:t>torch.Tensor (device)</a:t>
-                      </a:r>
-                    </a:p>
-                  </a:txBody>
-                  <a:tcPr marL="73152" marR="54864" marT="27432" marB="27432">
+                      <a:pPr>
+                        <a:spcBef>
+                          <a:spcPts val="0"/>
+                        </a:spcBef>
+                        <a:spcAft>
+                          <a:spcPts val="0"/>
+                        </a:spcAft>
+                      </a:pPr>
+                      <a:r>
+                        <a:rPr sz="1150" b="0">
+                          <a:solidFill>
+                            <a:srgbClr val="1B222E"/>
+                          </a:solidFill>
+                          <a:latin typeface="微软雅黑"/>
+                          <a:ea typeface="微软雅黑"/>
+                        </a:rPr>
+                        <a:t>全部调用点 .tolist() 构造</a:t>
+                      </a:r>
+                    </a:p>
+                    <a:p>
+                      <a:pPr>
+                        <a:spcBef>
+                          <a:spcPts val="0"/>
+                        </a:spcBef>
+                        <a:spcAft>
+                          <a:spcPts val="0"/>
+                        </a:spcAft>
+                      </a:pPr>
+                      <a:r>
+                        <a:rPr sz="1150" b="0">
+                          <a:solidFill>
+                            <a:srgbClr val="1B222E"/>
+                          </a:solidFill>
+                          <a:latin typeface="微软雅黑"/>
+                          <a:ea typeface="微软雅黑"/>
+                        </a:rPr>
+                        <a:t>actual_seq_lengths_q: list[int]</a:t>
+                      </a:r>
+                    </a:p>
+                  </a:txBody>
+                  <a:tcPr marL="64008" marR="64008" marT="18288" marB="18288">
                     <a:solidFill>
                       <a:srgbClr val="FFFFFF"/>
                     </a:solidFill>
@@ -4316,19 +5328,257 @@
                     <a:bodyPr wrap="square"/>
                     <a:lstStyle/>
                     <a:p>
-                      <a:r>
-                        <a:rPr sz="1250" b="0">
-                          <a:solidFill>
-                            <a:srgbClr val="1B222E"/>
-                          </a:solidFill>
-                        </a:rPr>
-                        <a:t>execute_sparse_flash_attention_process(
-   actual_seq_lengths_query: torch.Tensor, …)
- call sites pass query_start_loc[1:].clone()</a:t>
-                      </a:r>
-                    </a:p>
-                  </a:txBody>
-                  <a:tcPr marL="73152" marR="54864" marT="27432" marB="27432">
+                      <a:pPr>
+                        <a:spcBef>
+                          <a:spcPts val="0"/>
+                        </a:spcBef>
+                        <a:spcAft>
+                          <a:spcPts val="0"/>
+                        </a:spcAft>
+                      </a:pPr>
+                      <a:r>
+                        <a:rPr sz="1150" b="0">
+                          <a:solidFill>
+                            <a:srgbClr val="1B222E"/>
+                          </a:solidFill>
+                          <a:latin typeface="微软雅黑"/>
+                          <a:ea typeface="微软雅黑"/>
+                        </a:rPr>
+                        <a:t>execute_sparse_flash_attention_process(</a:t>
+                      </a:r>
+                    </a:p>
+                    <a:p>
+                      <a:pPr>
+                        <a:spcBef>
+                          <a:spcPts val="0"/>
+                        </a:spcBef>
+                        <a:spcAft>
+                          <a:spcPts val="0"/>
+                        </a:spcAft>
+                      </a:pPr>
+                      <a:r>
+                        <a:rPr sz="1150" b="0">
+                          <a:solidFill>
+                            <a:srgbClr val="1B222E"/>
+                          </a:solidFill>
+                          <a:latin typeface="微软雅黑"/>
+                          <a:ea typeface="微软雅黑"/>
+                        </a:rPr>
+                        <a:t>  actual_seq_lengths_query: torch.Tensor, …)</a:t>
+                      </a:r>
+                    </a:p>
+                    <a:p>
+                      <a:pPr>
+                        <a:spcBef>
+                          <a:spcPts val="0"/>
+                        </a:spcBef>
+                        <a:spcAft>
+                          <a:spcPts val="0"/>
+                        </a:spcAft>
+                      </a:pPr>
+                      <a:r>
+                        <a:rPr sz="1150" b="0">
+                          <a:solidFill>
+                            <a:srgbClr val="1B222E"/>
+                          </a:solidFill>
+                          <a:latin typeface="微软雅黑"/>
+                          <a:ea typeface="微软雅黑"/>
+                        </a:rPr>
+                        <a:t>调用处传 query_start_loc[1:].clone()</a:t>
+                      </a:r>
+                    </a:p>
+                  </a:txBody>
+                  <a:tcPr marL="64008" marR="64008" marT="18288" marB="18288">
+                    <a:solidFill>
+                      <a:srgbClr val="FFFFFF"/>
+                    </a:solidFill>
+                  </a:tcPr>
+                </a:tc>
+              </a:tr>
+              <a:tr h="658368">
+                <a:tc>
+                  <a:txBody>
+                    <a:bodyPr wrap="square"/>
+                    <a:lstStyle/>
+                    <a:p>
+                      <a:pPr>
+                        <a:spcBef>
+                          <a:spcPts val="0"/>
+                        </a:spcBef>
+                        <a:spcAft>
+                          <a:spcPts val="0"/>
+                        </a:spcAft>
+                      </a:pPr>
+                      <a:r>
+                        <a:rPr sz="1150" b="0">
+                          <a:solidFill>
+                            <a:srgbClr val="1B222E"/>
+                          </a:solidFill>
+                          <a:latin typeface="微软雅黑"/>
+                          <a:ea typeface="微软雅黑"/>
+                        </a:rPr>
+                        <a:t>适用模型</a:t>
+                      </a:r>
+                    </a:p>
+                  </a:txBody>
+                  <a:tcPr marL="64008" marR="64008" marT="18288" marB="18288">
+                    <a:solidFill>
+                      <a:srgbClr val="FFFFFF"/>
+                    </a:solidFill>
+                  </a:tcPr>
+                </a:tc>
+                <a:tc>
+                  <a:txBody>
+                    <a:bodyPr wrap="square"/>
+                    <a:lstStyle/>
+                    <a:p>
+                      <a:pPr>
+                        <a:spcBef>
+                          <a:spcPts val="0"/>
+                        </a:spcBef>
+                        <a:spcAft>
+                          <a:spcPts val="0"/>
+                        </a:spcAft>
+                      </a:pPr>
+                      <a:r>
+                        <a:rPr sz="1150" b="0">
+                          <a:solidFill>
+                            <a:srgbClr val="1B222E"/>
+                          </a:solidFill>
+                          <a:latin typeface="微软雅黑"/>
+                          <a:ea typeface="微软雅黑"/>
+                        </a:rPr>
+                        <a:t>通用稠密模型(Qwen3 等)</a:t>
+                      </a:r>
+                    </a:p>
+                  </a:txBody>
+                  <a:tcPr marL="64008" marR="64008" marT="18288" marB="18288">
+                    <a:solidFill>
+                      <a:srgbClr val="FFFFFF"/>
+                    </a:solidFill>
+                  </a:tcPr>
+                </a:tc>
+                <a:tc>
+                  <a:txBody>
+                    <a:bodyPr wrap="square"/>
+                    <a:lstStyle/>
+                    <a:p>
+                      <a:pPr>
+                        <a:spcBef>
+                          <a:spcPts val="0"/>
+                        </a:spcBef>
+                        <a:spcAft>
+                          <a:spcPts val="0"/>
+                        </a:spcAft>
+                      </a:pPr>
+                      <a:r>
+                        <a:rPr sz="1150" b="0">
+                          <a:solidFill>
+                            <a:srgbClr val="1B222E"/>
+                          </a:solidFill>
+                          <a:latin typeface="微软雅黑"/>
+                          <a:ea typeface="微软雅黑"/>
+                        </a:rPr>
+                        <a:t>DeepSeek-V4-Flash</a:t>
+                      </a:r>
+                    </a:p>
+                  </a:txBody>
+                  <a:tcPr marL="64008" marR="64008" marT="18288" marB="18288">
+                    <a:solidFill>
+                      <a:srgbClr val="FFFFFF"/>
+                    </a:solidFill>
+                  </a:tcPr>
+                </a:tc>
+              </a:tr>
+              <a:tr h="658368">
+                <a:tc>
+                  <a:txBody>
+                    <a:bodyPr wrap="square"/>
+                    <a:lstStyle/>
+                    <a:p>
+                      <a:pPr>
+                        <a:spcBef>
+                          <a:spcPts val="0"/>
+                        </a:spcBef>
+                        <a:spcAft>
+                          <a:spcPts val="0"/>
+                        </a:spcAft>
+                      </a:pPr>
+                      <a:r>
+                        <a:rPr sz="1150" b="0">
+                          <a:solidFill>
+                            <a:srgbClr val="1B222E"/>
+                          </a:solidFill>
+                          <a:latin typeface="微软雅黑"/>
+                          <a:ea typeface="微软雅黑"/>
+                        </a:rPr>
+                        <a:t>动态 K 前置条件</a:t>
+                      </a:r>
+                    </a:p>
+                  </a:txBody>
+                  <a:tcPr marL="64008" marR="64008" marT="18288" marB="18288">
+                    <a:solidFill>
+                      <a:srgbClr val="FFFFFF"/>
+                    </a:solidFill>
+                  </a:tcPr>
+                </a:tc>
+                <a:tc>
+                  <a:txBody>
+                    <a:bodyPr wrap="square"/>
+                    <a:lstStyle/>
+                    <a:p>
+                      <a:pPr>
+                        <a:spcBef>
+                          <a:spcPts val="0"/>
+                        </a:spcBef>
+                        <a:spcAft>
+                          <a:spcPts val="0"/>
+                        </a:spcAft>
+                      </a:pPr>
+                      <a:r>
+                        <a:rPr sz="1150" b="0">
+                          <a:solidFill>
+                            <a:srgbClr val="B45309"/>
+                          </a:solidFill>
+                          <a:latin typeface="微软雅黑"/>
+                          <a:ea typeface="微软雅黑"/>
+                        </a:rPr>
+                        <a:t>不满足 —— 每轮长度必过 host</a:t>
+                      </a:r>
+                    </a:p>
+                  </a:txBody>
+                  <a:tcPr marL="64008" marR="64008" marT="18288" marB="18288">
+                    <a:solidFill>
+                      <a:srgbClr val="FFFFFF"/>
+                    </a:solidFill>
+                  </a:tcPr>
+                </a:tc>
+                <a:tc>
+                  <a:txBody>
+                    <a:bodyPr wrap="square"/>
+                    <a:lstStyle/>
+                    <a:p>
+                      <a:pPr>
+                        <a:spcBef>
+                          <a:spcPts val="0"/>
+                        </a:spcBef>
+                        <a:spcAft>
+                          <a:spcPts val="0"/>
+                        </a:spcAft>
+                      </a:pPr>
+                      <a:r>
+                        <a:rPr sz="1150" b="0">
+                          <a:solidFill>
+                            <a:srgbClr val="0E7A4B"/>
+                          </a:solidFill>
+                          <a:latin typeface="微软雅黑"/>
+                          <a:ea typeface="微软雅黑"/>
+                        </a:rPr>
+                        <a:t>已满足 —— 无需新造</a:t>
+                      </a:r>
+                    </a:p>
+                  </a:txBody>
+                  <a:tcPr marL="64008" marR="64008" marT="18288" marB="18288">
                     <a:solidFill>
                       <a:srgbClr val="FFFFFF"/>
                     </a:solidFill>
@@ -4347,8 +5597,8 @@
         </p:nvSpPr>
         <p:spPr>
           <a:xfrm>
-            <a:off x="566928" y="4572000"/>
-            <a:ext cx="11064240" cy="1737360"/>
+            <a:off x="502920" y="5074920"/>
+            <a:ext cx="11247120" cy="1371600"/>
           </a:xfrm>
           <a:prstGeom prst="rect">
             <a:avLst/>
@@ -4370,12 +5620,14 @@
               </a:spcAft>
             </a:pPr>
             <a:r>
-              <a:rPr sz="1700" b="1" i="0">
+              <a:rPr sz="1450" b="0">
                 <a:solidFill>
-                  <a:srgbClr val="0E7A4B"/>
+                  <a:srgbClr val="1B222E"/>
                 </a:solidFill>
+                <a:latin typeface="微软雅黑"/>
+                <a:ea typeface="微软雅黑"/>
               </a:rPr>
-              <a:t>DeepSeek-V4-Flash runs on the DSA path, not the FIA path.</a:t>
+              <a:t>对照:GPU 侧 #48692 同样只覆盖 FLASH_ATTENTION —— 两边都是“先在一族算子上跑通,再谈通用”。</a:t>
             </a:r>
           </a:p>
           <a:p>
@@ -4388,12 +5640,14 @@
               </a:spcAft>
             </a:pPr>
             <a:r>
-              <a:rPr sz="1500" b="0" i="0">
+              <a:rPr sz="1500" b="1">
                 <a:solidFill>
-                  <a:srgbClr val="1B222E"/>
+                  <a:srgbClr val="1F6FEB"/>
                 </a:solidFill>
+                <a:latin typeface="微软雅黑"/>
+                <a:ea typeface="微软雅黑"/>
               </a:rPr>
-              <a:t>So for this model the hardest prerequisite — keeping K_i on the device instead of round-tripping through a Python list — is already satisfied by the operators it uses. The host-list constraint applies to the generic FIA path used by dense models, which is the same scope limit PR #48692 has on the GPU side (FLASH_ATTENTION only).</a:t>
+              <a:t>⟹ DSV4 可以现在就做;通用模型这条线的前置工作是让 FIA v2 接受设备张量长度(算子层改动),或接受每轮 host metadata 的代价。</a:t>
             </a:r>
           </a:p>
         </p:txBody>
@@ -4432,8 +5686,8 @@
         </p:nvSpPr>
         <p:spPr>
           <a:xfrm>
-            <a:off x="566928" y="384048"/>
-            <a:ext cx="11064240" cy="914400"/>
+            <a:off x="502920" y="274320"/>
+            <a:ext cx="11247120" cy="868680"/>
           </a:xfrm>
           <a:prstGeom prst="rect">
             <a:avLst/>
@@ -4455,30 +5709,34 @@
               </a:spcAft>
             </a:pPr>
             <a:r>
-              <a:rPr sz="2800" b="1" i="0">
+              <a:rPr sz="2500" b="1">
                 <a:solidFill>
                   <a:srgbClr val="1B222E"/>
                 </a:solidFill>
+                <a:latin typeface="微软雅黑"/>
+                <a:ea typeface="微软雅黑"/>
               </a:rPr>
-              <a:t>Finding 3 — the workspace cache is keyed by exactly what adaptive K changes</a:t>
+              <a:t>③ 动态 K 的增量代价在哪 —— 不是 graph update</a:t>
             </a:r>
           </a:p>
           <a:p>
             <a:pPr algn="l">
               <a:spcBef>
-                <a:spcPts val="400"/>
+                <a:spcPts val="300"/>
               </a:spcBef>
               <a:spcAft>
                 <a:spcPts val="0"/>
               </a:spcAft>
             </a:pPr>
             <a:r>
-              <a:rPr sz="1350" b="0" i="0">
+              <a:rPr sz="1200" b="0">
                 <a:solidFill>
                   <a:srgbClr val="5B6677"/>
                 </a:solidFill>
+                <a:latin typeface="微软雅黑"/>
+                <a:ea typeface="微软雅黑"/>
               </a:rPr>
-              <a:t>vllm_ascend/attention/attention_v1.py</a:t>
+              <a:t>固定-K 投机早已入图,replay 前逐层更新 seq lengths 的开销已经在付了</a:t>
             </a:r>
           </a:p>
         </p:txBody>
@@ -4491,8 +5749,8 @@
         </p:nvSpPr>
         <p:spPr>
           <a:xfrm>
-            <a:off x="566928" y="1298448"/>
-            <a:ext cx="1371600" cy="26000"/>
+            <a:off x="502920" y="1115568"/>
+            <a:ext cx="1188720" cy="24000"/>
           </a:xfrm>
           <a:prstGeom prst="rect">
             <a:avLst/>
@@ -4535,8 +5793,8 @@
         </p:nvSpPr>
         <p:spPr>
           <a:xfrm>
-            <a:off x="566928" y="1691640"/>
-            <a:ext cx="11064240" cy="1600200"/>
+            <a:off x="502920" y="1572768"/>
+            <a:ext cx="11247120" cy="2331720"/>
           </a:xfrm>
           <a:prstGeom prst="rect">
             <a:avLst/>
@@ -4566,115 +5824,898 @@
           </a:fontRef>
         </p:style>
         <p:txBody>
-          <a:bodyPr rtlCol="0" anchor="ctr" wrap="square" lIns="146304" tIns="91440"/>
+          <a:bodyPr rtlCol="0" anchor="ctr" wrap="square" lIns="128016" tIns="73152"/>
           <a:lstStyle/>
           <a:p>
             <a:pPr algn="ctr">
               <a:spcBef>
-                <a:spcPts val="100"/>
+                <a:spcPts val="0"/>
               </a:spcBef>
               <a:spcAft>
-                <a:spcPts val="100"/>
+                <a:spcPts val="0"/>
               </a:spcAft>
             </a:pPr>
             <a:r>
-              <a:rPr sz="1200">
+              <a:rPr sz="1100">
                 <a:solidFill>
                   <a:srgbClr val="1B222E"/>
                 </a:solidFill>
                 <a:latin typeface="Consolas"/>
+                <a:ea typeface="Consolas"/>
               </a:rPr>
-              <a:t>num_tokens = attn_metadata.actual_seq_lengths_q[-1]   # total tokens this round</a:t>
+              <a:t># attention_v1.py —— 固定-K 投机的图 replay 已存在</a:t>
             </a:r>
           </a:p>
           <a:p>
             <a:pPr>
               <a:spcBef>
-                <a:spcPts val="100"/>
+                <a:spcPts val="0"/>
               </a:spcBef>
               <a:spcAft>
-                <a:spcPts val="100"/>
+                <a:spcPts val="0"/>
               </a:spcAft>
             </a:pPr>
             <a:r>
-              <a:rPr sz="1200">
+              <a:rPr sz="1100">
                 <a:solidFill>
                   <a:srgbClr val="1B222E"/>
                 </a:solidFill>
                 <a:latin typeface="Consolas"/>
+                <a:ea typeface="Consolas"/>
               </a:rPr>
-              <a:t>workspace  = graph_params.workspaces.get(num_tokens)  # cache keyed by that total</a:t>
+              <a:t>if _EXTRA_CTX.is_draft_model:</a:t>
             </a:r>
           </a:p>
           <a:p>
             <a:pPr>
               <a:spcBef>
-                <a:spcPts val="100"/>
+                <a:spcPts val="0"/>
               </a:spcBef>
               <a:spcAft>
-                <a:spcPts val="100"/>
+                <a:spcPts val="0"/>
               </a:spcAft>
             </a:pPr>
             <a:r>
-              <a:rPr sz="1200">
+              <a:rPr sz="1100">
                 <a:solidFill>
                   <a:srgbClr val="1B222E"/>
                 </a:solidFill>
                 <a:latin typeface="Consolas"/>
+                <a:ea typeface="Consolas"/>
               </a:rPr>
-              <a:t>...</a:t>
+              <a:t>    draft_step, key = draft_attn_key_steps[attn_count]</a:t>
             </a:r>
           </a:p>
           <a:p>
             <a:pPr>
               <a:spcBef>
-                <a:spcPts val="100"/>
+                <a:spcPts val="0"/>
               </a:spcBef>
               <a:spcAft>
-                <a:spcPts val="100"/>
+                <a:spcPts val="0"/>
               </a:spcAft>
             </a:pPr>
             <a:r>
-              <a:rPr sz="1200">
+              <a:rPr sz="1100">
                 <a:solidFill>
                   <a:srgbClr val="1B222E"/>
                 </a:solidFill>
                 <a:latin typeface="Consolas"/>
+                <a:ea typeface="Consolas"/>
               </a:rPr>
-              <a:t>elif workspace is None:                               # query only on a miss</a:t>
+              <a:t>    actual_seq_lengths_q = attn_metadata[draft_step][key].actual_seq_lengths_q</a:t>
             </a:r>
           </a:p>
           <a:p>
             <a:pPr>
               <a:spcBef>
-                <a:spcPts val="100"/>
+                <a:spcPts val="0"/>
               </a:spcBef>
               <a:spcAft>
-                <a:spcPts val="100"/>
+                <a:spcPts val="0"/>
               </a:spcAft>
             </a:pPr>
             <a:r>
-              <a:rPr sz="1200">
+              <a:rPr sz="1100">
                 <a:solidFill>
                   <a:srgbClr val="1B222E"/>
                 </a:solidFill>
                 <a:latin typeface="Consolas"/>
+                <a:ea typeface="Consolas"/>
+              </a:rPr>
+              <a:t>torch.npu.graph_task_update_begin(update_stream, handle)   # 逐层更新 → 已有开销</a:t>
+            </a:r>
+          </a:p>
+          <a:p>
+            <a:pPr>
+              <a:spcBef>
+                <a:spcPts val="0"/>
+              </a:spcBef>
+              <a:spcAft>
+                <a:spcPts val="0"/>
+              </a:spcAft>
+            </a:pPr>
+            <a:r>
+              <a:rPr sz="1100">
+                <a:solidFill>
+                  <a:srgbClr val="1B222E"/>
+                </a:solidFill>
+                <a:latin typeface="Consolas"/>
+                <a:ea typeface="Consolas"/>
+              </a:rPr>
+              <a:t/>
+            </a:r>
+          </a:p>
+          <a:p>
+            <a:pPr>
+              <a:spcBef>
+                <a:spcPts val="0"/>
+              </a:spcBef>
+              <a:spcAft>
+                <a:spcPts val="0"/>
+              </a:spcAft>
+            </a:pPr>
+            <a:r>
+              <a:rPr sz="1100">
+                <a:solidFill>
+                  <a:srgbClr val="1B222E"/>
+                </a:solidFill>
+                <a:latin typeface="Consolas"/>
+                <a:ea typeface="Consolas"/>
+              </a:rPr>
+              <a:t># 但 workspace 缓存键正好是动态 K 会变的那个量</a:t>
+            </a:r>
+          </a:p>
+          <a:p>
+            <a:pPr>
+              <a:spcBef>
+                <a:spcPts val="0"/>
+              </a:spcBef>
+              <a:spcAft>
+                <a:spcPts val="0"/>
+              </a:spcAft>
+            </a:pPr>
+            <a:r>
+              <a:rPr sz="1100">
+                <a:solidFill>
+                  <a:srgbClr val="1B222E"/>
+                </a:solidFill>
+                <a:latin typeface="Consolas"/>
+                <a:ea typeface="Consolas"/>
+              </a:rPr>
+              <a:t>num_tokens = attn_metadata.actual_seq_lengths_q[-1]    # 本轮总 token 数</a:t>
+            </a:r>
+          </a:p>
+          <a:p>
+            <a:pPr>
+              <a:spcBef>
+                <a:spcPts val="0"/>
+              </a:spcBef>
+              <a:spcAft>
+                <a:spcPts val="0"/>
+              </a:spcAft>
+            </a:pPr>
+            <a:r>
+              <a:rPr sz="1100">
+                <a:solidFill>
+                  <a:srgbClr val="1B222E"/>
+                </a:solidFill>
+                <a:latin typeface="Consolas"/>
+                <a:ea typeface="Consolas"/>
+              </a:rPr>
+              <a:t>workspace  = graph_params.workspaces.get(num_tokens)   # 按总 token 数缓存</a:t>
+            </a:r>
+          </a:p>
+          <a:p>
+            <a:pPr>
+              <a:spcBef>
+                <a:spcPts val="0"/>
+              </a:spcBef>
+              <a:spcAft>
+                <a:spcPts val="0"/>
+              </a:spcAft>
+            </a:pPr>
+            <a:r>
+              <a:rPr sz="1100">
+                <a:solidFill>
+                  <a:srgbClr val="1B222E"/>
+                </a:solidFill>
+                <a:latin typeface="Consolas"/>
+                <a:ea typeface="Consolas"/>
+              </a:rPr>
+              <a:t>elif workspace is None:                                # 仅未命中时查询</a:t>
+            </a:r>
+          </a:p>
+          <a:p>
+            <a:pPr>
+              <a:spcBef>
+                <a:spcPts val="0"/>
+              </a:spcBef>
+              <a:spcAft>
+                <a:spcPts val="0"/>
+              </a:spcAft>
+            </a:pPr>
+            <a:r>
+              <a:rPr sz="1100">
+                <a:solidFill>
+                  <a:srgbClr val="1B222E"/>
+                </a:solidFill>
+                <a:latin typeface="Consolas"/>
+                <a:ea typeface="Consolas"/>
               </a:rPr>
               <a:t>    workspace = torch_npu._npu_fused_infer_attention_score_v2_get_max_workspace(...)</a:t>
             </a:r>
           </a:p>
         </p:txBody>
       </p:sp>
+      <p:graphicFrame>
+        <p:nvGraphicFramePr>
+          <p:cNvPr id="5" name="Table 4"/>
+          <p:cNvGraphicFramePr>
+            <a:graphicFrameLocks noGrp="1"/>
+          </p:cNvGraphicFramePr>
+          <p:nvPr/>
+        </p:nvGraphicFramePr>
+        <p:xfrm>
+          <a:off x="502920" y="4069080"/>
+          <a:ext cx="11247119" cy="1828800"/>
+        </p:xfrm>
+        <a:graphic>
+          <a:graphicData uri="http://schemas.openxmlformats.org/drawingml/2006/table">
+            <a:tbl>
+              <a:tblPr firstRow="1" bandRow="1">
+                <a:tableStyleId>{5C22544A-7EE6-4342-B048-85BDC9FD1C3A}</a:tableStyleId>
+              </a:tblPr>
+              <a:tblGrid>
+                <a:gridCol w="2474366"/>
+                <a:gridCol w="1687068"/>
+                <a:gridCol w="2811780"/>
+                <a:gridCol w="4273905"/>
+              </a:tblGrid>
+              <a:tr h="365760">
+                <a:tc>
+                  <a:txBody>
+                    <a:bodyPr wrap="square"/>
+                    <a:lstStyle/>
+                    <a:p>
+                      <a:pPr>
+                        <a:spcBef>
+                          <a:spcPts val="0"/>
+                        </a:spcBef>
+                        <a:spcAft>
+                          <a:spcPts val="0"/>
+                        </a:spcAft>
+                      </a:pPr>
+                      <a:r>
+                        <a:rPr sz="1150" b="1">
+                          <a:solidFill>
+                            <a:srgbClr val="1B222E"/>
+                          </a:solidFill>
+                          <a:latin typeface="微软雅黑"/>
+                          <a:ea typeface="微软雅黑"/>
+                        </a:rPr>
+                        <a:t>增量项</a:t>
+                      </a:r>
+                    </a:p>
+                  </a:txBody>
+                  <a:tcPr marL="64008" marR="64008" marT="18288" marB="18288">
+                    <a:solidFill>
+                      <a:srgbClr val="F2F5F9"/>
+                    </a:solidFill>
+                  </a:tcPr>
+                </a:tc>
+                <a:tc>
+                  <a:txBody>
+                    <a:bodyPr wrap="square"/>
+                    <a:lstStyle/>
+                    <a:p>
+                      <a:pPr>
+                        <a:spcBef>
+                          <a:spcPts val="0"/>
+                        </a:spcBef>
+                        <a:spcAft>
+                          <a:spcPts val="0"/>
+                        </a:spcAft>
+                      </a:pPr>
+                      <a:r>
+                        <a:rPr sz="1150" b="1">
+                          <a:solidFill>
+                            <a:srgbClr val="1B222E"/>
+                          </a:solidFill>
+                          <a:latin typeface="微软雅黑"/>
+                          <a:ea typeface="微软雅黑"/>
+                        </a:rPr>
+                        <a:t>固定 K</a:t>
+                      </a:r>
+                    </a:p>
+                  </a:txBody>
+                  <a:tcPr marL="64008" marR="64008" marT="18288" marB="18288">
+                    <a:solidFill>
+                      <a:srgbClr val="F2F5F9"/>
+                    </a:solidFill>
+                  </a:tcPr>
+                </a:tc>
+                <a:tc>
+                  <a:txBody>
+                    <a:bodyPr wrap="square"/>
+                    <a:lstStyle/>
+                    <a:p>
+                      <a:pPr>
+                        <a:spcBef>
+                          <a:spcPts val="0"/>
+                        </a:spcBef>
+                        <a:spcAft>
+                          <a:spcPts val="0"/>
+                        </a:spcAft>
+                      </a:pPr>
+                      <a:r>
+                        <a:rPr sz="1150" b="1">
+                          <a:solidFill>
+                            <a:srgbClr val="1B222E"/>
+                          </a:solidFill>
+                          <a:latin typeface="微软雅黑"/>
+                          <a:ea typeface="微软雅黑"/>
+                        </a:rPr>
+                        <a:t>动态 K_i</a:t>
+                      </a:r>
+                    </a:p>
+                  </a:txBody>
+                  <a:tcPr marL="64008" marR="64008" marT="18288" marB="18288">
+                    <a:solidFill>
+                      <a:srgbClr val="F2F5F9"/>
+                    </a:solidFill>
+                  </a:tcPr>
+                </a:tc>
+                <a:tc>
+                  <a:txBody>
+                    <a:bodyPr wrap="square"/>
+                    <a:lstStyle/>
+                    <a:p>
+                      <a:pPr>
+                        <a:spcBef>
+                          <a:spcPts val="0"/>
+                        </a:spcBef>
+                        <a:spcAft>
+                          <a:spcPts val="0"/>
+                        </a:spcAft>
+                      </a:pPr>
+                      <a:r>
+                        <a:rPr sz="1150" b="1">
+                          <a:solidFill>
+                            <a:srgbClr val="1B222E"/>
+                          </a:solidFill>
+                          <a:latin typeface="微软雅黑"/>
+                          <a:ea typeface="微软雅黑"/>
+                        </a:rPr>
+                        <a:t>说明</a:t>
+                      </a:r>
+                    </a:p>
+                  </a:txBody>
+                  <a:tcPr marL="64008" marR="64008" marT="18288" marB="18288">
+                    <a:solidFill>
+                      <a:srgbClr val="F2F5F9"/>
+                    </a:solidFill>
+                  </a:tcPr>
+                </a:tc>
+              </a:tr>
+              <a:tr h="365760">
+                <a:tc>
+                  <a:txBody>
+                    <a:bodyPr wrap="square"/>
+                    <a:lstStyle/>
+                    <a:p>
+                      <a:pPr>
+                        <a:spcBef>
+                          <a:spcPts val="0"/>
+                        </a:spcBef>
+                        <a:spcAft>
+                          <a:spcPts val="0"/>
+                        </a:spcAft>
+                      </a:pPr>
+                      <a:r>
+                        <a:rPr sz="1150" b="0">
+                          <a:solidFill>
+                            <a:srgbClr val="1B222E"/>
+                          </a:solidFill>
+                          <a:latin typeface="微软雅黑"/>
+                          <a:ea typeface="微软雅黑"/>
+                        </a:rPr>
+                        <a:t>workspace 查询</a:t>
+                      </a:r>
+                    </a:p>
+                  </a:txBody>
+                  <a:tcPr marL="64008" marR="64008" marT="18288" marB="18288">
+                    <a:solidFill>
+                      <a:srgbClr val="FFFFFF"/>
+                    </a:solidFill>
+                  </a:tcPr>
+                </a:tc>
+                <a:tc>
+                  <a:txBody>
+                    <a:bodyPr wrap="square"/>
+                    <a:lstStyle/>
+                    <a:p>
+                      <a:pPr>
+                        <a:spcBef>
+                          <a:spcPts val="0"/>
+                        </a:spcBef>
+                        <a:spcAft>
+                          <a:spcPts val="0"/>
+                        </a:spcAft>
+                      </a:pPr>
+                      <a:r>
+                        <a:rPr sz="1150" b="0">
+                          <a:solidFill>
+                            <a:srgbClr val="1B222E"/>
+                          </a:solidFill>
+                          <a:latin typeface="微软雅黑"/>
+                          <a:ea typeface="微软雅黑"/>
+                        </a:rPr>
+                        <a:t>恒命中</a:t>
+                      </a:r>
+                    </a:p>
+                  </a:txBody>
+                  <a:tcPr marL="64008" marR="64008" marT="18288" marB="18288">
+                    <a:solidFill>
+                      <a:srgbClr val="FFFFFF"/>
+                    </a:solidFill>
+                  </a:tcPr>
+                </a:tc>
+                <a:tc>
+                  <a:txBody>
+                    <a:bodyPr wrap="square"/>
+                    <a:lstStyle/>
+                    <a:p>
+                      <a:pPr>
+                        <a:spcBef>
+                          <a:spcPts val="0"/>
+                        </a:spcBef>
+                        <a:spcAft>
+                          <a:spcPts val="0"/>
+                        </a:spcAft>
+                      </a:pPr>
+                      <a:r>
+                        <a:rPr sz="1150" b="0">
+                          <a:solidFill>
+                            <a:srgbClr val="B45309"/>
+                          </a:solidFill>
+                          <a:latin typeface="微软雅黑"/>
+                          <a:ea typeface="微软雅黑"/>
+                        </a:rPr>
+                        <a:t>每轮每层 miss</a:t>
+                      </a:r>
+                    </a:p>
+                  </a:txBody>
+                  <a:tcPr marL="64008" marR="64008" marT="18288" marB="18288">
+                    <a:solidFill>
+                      <a:srgbClr val="FFFFFF"/>
+                    </a:solidFill>
+                  </a:tcPr>
+                </a:tc>
+                <a:tc>
+                  <a:txBody>
+                    <a:bodyPr wrap="square"/>
+                    <a:lstStyle/>
+                    <a:p>
+                      <a:pPr>
+                        <a:spcBef>
+                          <a:spcPts val="0"/>
+                        </a:spcBef>
+                        <a:spcAft>
+                          <a:spcPts val="0"/>
+                        </a:spcAft>
+                      </a:pPr>
+                      <a:r>
+                        <a:rPr sz="1150" b="0">
+                          <a:solidFill>
+                            <a:srgbClr val="1B222E"/>
+                          </a:solidFill>
+                          <a:latin typeface="微软雅黑"/>
+                          <a:ea typeface="微软雅黑"/>
+                        </a:rPr>
+                        <a:t>缓存键 = 总 token 数</a:t>
+                      </a:r>
+                    </a:p>
+                  </a:txBody>
+                  <a:tcPr marL="64008" marR="64008" marT="18288" marB="18288">
+                    <a:solidFill>
+                      <a:srgbClr val="FFFFFF"/>
+                    </a:solidFill>
+                  </a:tcPr>
+                </a:tc>
+              </a:tr>
+              <a:tr h="365760">
+                <a:tc>
+                  <a:txBody>
+                    <a:bodyPr wrap="square"/>
+                    <a:lstStyle/>
+                    <a:p>
+                      <a:pPr>
+                        <a:spcBef>
+                          <a:spcPts val="0"/>
+                        </a:spcBef>
+                        <a:spcAft>
+                          <a:spcPts val="0"/>
+                        </a:spcAft>
+                      </a:pPr>
+                      <a:r>
+                        <a:rPr sz="1150" b="0">
+                          <a:solidFill>
+                            <a:srgbClr val="1B222E"/>
+                          </a:solidFill>
+                          <a:latin typeface="微软雅黑"/>
+                          <a:ea typeface="微软雅黑"/>
+                        </a:rPr>
+                        <a:t>graph task update</a:t>
+                      </a:r>
+                    </a:p>
+                  </a:txBody>
+                  <a:tcPr marL="64008" marR="64008" marT="18288" marB="18288">
+                    <a:solidFill>
+                      <a:srgbClr val="FFFFFF"/>
+                    </a:solidFill>
+                  </a:tcPr>
+                </a:tc>
+                <a:tc>
+                  <a:txBody>
+                    <a:bodyPr wrap="square"/>
+                    <a:lstStyle/>
+                    <a:p>
+                      <a:pPr>
+                        <a:spcBef>
+                          <a:spcPts val="0"/>
+                        </a:spcBef>
+                        <a:spcAft>
+                          <a:spcPts val="0"/>
+                        </a:spcAft>
+                      </a:pPr>
+                      <a:r>
+                        <a:rPr sz="1150" b="0">
+                          <a:solidFill>
+                            <a:srgbClr val="1B222E"/>
+                          </a:solidFill>
+                          <a:latin typeface="微软雅黑"/>
+                          <a:ea typeface="微软雅黑"/>
+                        </a:rPr>
+                        <a:t>已在付</a:t>
+                      </a:r>
+                    </a:p>
+                  </a:txBody>
+                  <a:tcPr marL="64008" marR="64008" marT="18288" marB="18288">
+                    <a:solidFill>
+                      <a:srgbClr val="FFFFFF"/>
+                    </a:solidFill>
+                  </a:tcPr>
+                </a:tc>
+                <a:tc>
+                  <a:txBody>
+                    <a:bodyPr wrap="square"/>
+                    <a:lstStyle/>
+                    <a:p>
+                      <a:pPr>
+                        <a:spcBef>
+                          <a:spcPts val="0"/>
+                        </a:spcBef>
+                        <a:spcAft>
+                          <a:spcPts val="0"/>
+                        </a:spcAft>
+                      </a:pPr>
+                      <a:r>
+                        <a:rPr sz="1150" b="0">
+                          <a:solidFill>
+                            <a:srgbClr val="0E7A4B"/>
+                          </a:solidFill>
+                          <a:latin typeface="微软雅黑"/>
+                          <a:ea typeface="微软雅黑"/>
+                        </a:rPr>
+                        <a:t>同左,无增量</a:t>
+                      </a:r>
+                    </a:p>
+                  </a:txBody>
+                  <a:tcPr marL="64008" marR="64008" marT="18288" marB="18288">
+                    <a:solidFill>
+                      <a:srgbClr val="FFFFFF"/>
+                    </a:solidFill>
+                  </a:tcPr>
+                </a:tc>
+                <a:tc>
+                  <a:txBody>
+                    <a:bodyPr wrap="square"/>
+                    <a:lstStyle/>
+                    <a:p>
+                      <a:pPr>
+                        <a:spcBef>
+                          <a:spcPts val="0"/>
+                        </a:spcBef>
+                        <a:spcAft>
+                          <a:spcPts val="0"/>
+                        </a:spcAft>
+                      </a:pPr>
+                      <a:r>
+                        <a:rPr sz="1150" b="0">
+                          <a:solidFill>
+                            <a:srgbClr val="1B222E"/>
+                          </a:solidFill>
+                          <a:latin typeface="微软雅黑"/>
+                          <a:ea typeface="微软雅黑"/>
+                        </a:rPr>
+                        <a:t>两者都要逐层更新</a:t>
+                      </a:r>
+                    </a:p>
+                  </a:txBody>
+                  <a:tcPr marL="64008" marR="64008" marT="18288" marB="18288">
+                    <a:solidFill>
+                      <a:srgbClr val="FFFFFF"/>
+                    </a:solidFill>
+                  </a:tcPr>
+                </a:tc>
+              </a:tr>
+              <a:tr h="365760">
+                <a:tc>
+                  <a:txBody>
+                    <a:bodyPr wrap="square"/>
+                    <a:lstStyle/>
+                    <a:p>
+                      <a:pPr>
+                        <a:spcBef>
+                          <a:spcPts val="0"/>
+                        </a:spcBef>
+                        <a:spcAft>
+                          <a:spcPts val="0"/>
+                        </a:spcAft>
+                      </a:pPr>
+                      <a:r>
+                        <a:rPr sz="1150" b="0">
+                          <a:solidFill>
+                            <a:srgbClr val="1B222E"/>
+                          </a:solidFill>
+                          <a:latin typeface="微软雅黑"/>
+                          <a:ea typeface="微软雅黑"/>
+                        </a:rPr>
+                        <a:t>图键 / 捕图数量</a:t>
+                      </a:r>
+                    </a:p>
+                  </a:txBody>
+                  <a:tcPr marL="64008" marR="64008" marT="18288" marB="18288">
+                    <a:solidFill>
+                      <a:srgbClr val="FFFFFF"/>
+                    </a:solidFill>
+                  </a:tcPr>
+                </a:tc>
+                <a:tc>
+                  <a:txBody>
+                    <a:bodyPr wrap="square"/>
+                    <a:lstStyle/>
+                    <a:p>
+                      <a:pPr>
+                        <a:spcBef>
+                          <a:spcPts val="0"/>
+                        </a:spcBef>
+                        <a:spcAft>
+                          <a:spcPts val="0"/>
+                        </a:spcAft>
+                      </a:pPr>
+                      <a:r>
+                        <a:rPr sz="1150" b="0">
+                          <a:solidFill>
+                            <a:srgbClr val="1B222E"/>
+                          </a:solidFill>
+                          <a:latin typeface="微软雅黑"/>
+                          <a:ea typeface="微软雅黑"/>
+                        </a:rPr>
+                        <a:t>1 个形状</a:t>
+                      </a:r>
+                    </a:p>
+                  </a:txBody>
+                  <a:tcPr marL="64008" marR="64008" marT="18288" marB="18288">
+                    <a:solidFill>
+                      <a:srgbClr val="FFFFFF"/>
+                    </a:solidFill>
+                  </a:tcPr>
+                </a:tc>
+                <a:tc>
+                  <a:txBody>
+                    <a:bodyPr wrap="square"/>
+                    <a:lstStyle/>
+                    <a:p>
+                      <a:pPr>
+                        <a:spcBef>
+                          <a:spcPts val="0"/>
+                        </a:spcBef>
+                        <a:spcAft>
+                          <a:spcPts val="0"/>
+                        </a:spcAft>
+                      </a:pPr>
+                      <a:r>
+                        <a:rPr sz="1150" b="0">
+                          <a:solidFill>
+                            <a:srgbClr val="B45309"/>
+                          </a:solidFill>
+                          <a:latin typeface="微软雅黑"/>
+                          <a:ea typeface="微软雅黑"/>
+                        </a:rPr>
+                        <a:t>按 K_i 组合爆炸</a:t>
+                      </a:r>
+                    </a:p>
+                  </a:txBody>
+                  <a:tcPr marL="64008" marR="64008" marT="18288" marB="18288">
+                    <a:solidFill>
+                      <a:srgbClr val="FFFFFF"/>
+                    </a:solidFill>
+                  </a:tcPr>
+                </a:tc>
+                <a:tc>
+                  <a:txBody>
+                    <a:bodyPr wrap="square"/>
+                    <a:lstStyle/>
+                    <a:p>
+                      <a:pPr>
+                        <a:spcBef>
+                          <a:spcPts val="0"/>
+                        </a:spcBef>
+                        <a:spcAft>
+                          <a:spcPts val="0"/>
+                        </a:spcAft>
+                      </a:pPr>
+                      <a:r>
+                        <a:rPr sz="1150" b="0">
+                          <a:solidFill>
+                            <a:srgbClr val="1B222E"/>
+                          </a:solidFill>
+                          <a:latin typeface="微软雅黑"/>
+                          <a:ea typeface="微软雅黑"/>
+                        </a:rPr>
+                        <a:t>必须改为按 bucket 建键</a:t>
+                      </a:r>
+                    </a:p>
+                  </a:txBody>
+                  <a:tcPr marL="64008" marR="64008" marT="18288" marB="18288">
+                    <a:solidFill>
+                      <a:srgbClr val="FFFFFF"/>
+                    </a:solidFill>
+                  </a:tcPr>
+                </a:tc>
+              </a:tr>
+              <a:tr h="365760">
+                <a:tc>
+                  <a:txBody>
+                    <a:bodyPr wrap="square"/>
+                    <a:lstStyle/>
+                    <a:p>
+                      <a:pPr>
+                        <a:spcBef>
+                          <a:spcPts val="0"/>
+                        </a:spcBef>
+                        <a:spcAft>
+                          <a:spcPts val="0"/>
+                        </a:spcAft>
+                      </a:pPr>
+                      <a:r>
+                        <a:rPr sz="1150" b="0">
+                          <a:solidFill>
+                            <a:srgbClr val="1B222E"/>
+                          </a:solidFill>
+                          <a:latin typeface="微软雅黑"/>
+                          <a:ea typeface="微软雅黑"/>
+                        </a:rPr>
+                        <a:t>padding 浪费</a:t>
+                      </a:r>
+                    </a:p>
+                  </a:txBody>
+                  <a:tcPr marL="64008" marR="64008" marT="18288" marB="18288">
+                    <a:solidFill>
+                      <a:srgbClr val="FFFFFF"/>
+                    </a:solidFill>
+                  </a:tcPr>
+                </a:tc>
+                <a:tc>
+                  <a:txBody>
+                    <a:bodyPr wrap="square"/>
+                    <a:lstStyle/>
+                    <a:p>
+                      <a:pPr>
+                        <a:spcBef>
+                          <a:spcPts val="0"/>
+                        </a:spcBef>
+                        <a:spcAft>
+                          <a:spcPts val="0"/>
+                        </a:spcAft>
+                      </a:pPr>
+                      <a:r>
+                        <a:rPr sz="1150" b="0">
+                          <a:solidFill>
+                            <a:srgbClr val="1B222E"/>
+                          </a:solidFill>
+                          <a:latin typeface="微软雅黑"/>
+                          <a:ea typeface="微软雅黑"/>
+                        </a:rPr>
+                        <a:t>无</a:t>
+                      </a:r>
+                    </a:p>
+                  </a:txBody>
+                  <a:tcPr marL="64008" marR="64008" marT="18288" marB="18288">
+                    <a:solidFill>
+                      <a:srgbClr val="FFFFFF"/>
+                    </a:solidFill>
+                  </a:tcPr>
+                </a:tc>
+                <a:tc>
+                  <a:txBody>
+                    <a:bodyPr wrap="square"/>
+                    <a:lstStyle/>
+                    <a:p>
+                      <a:pPr>
+                        <a:spcBef>
+                          <a:spcPts val="0"/>
+                        </a:spcBef>
+                        <a:spcAft>
+                          <a:spcPts val="0"/>
+                        </a:spcAft>
+                      </a:pPr>
+                      <a:r>
+                        <a:rPr sz="1150" b="0">
+                          <a:solidFill>
+                            <a:srgbClr val="1B222E"/>
+                          </a:solidFill>
+                          <a:latin typeface="微软雅黑"/>
+                          <a:ea typeface="微软雅黑"/>
+                        </a:rPr>
+                        <a:t>取决于 bucket 宽度</a:t>
+                      </a:r>
+                    </a:p>
+                  </a:txBody>
+                  <a:tcPr marL="64008" marR="64008" marT="18288" marB="18288">
+                    <a:solidFill>
+                      <a:srgbClr val="FFFFFF"/>
+                    </a:solidFill>
+                  </a:tcPr>
+                </a:tc>
+                <a:tc>
+                  <a:txBody>
+                    <a:bodyPr wrap="square"/>
+                    <a:lstStyle/>
+                    <a:p>
+                      <a:pPr>
+                        <a:spcBef>
+                          <a:spcPts val="0"/>
+                        </a:spcBef>
+                        <a:spcAft>
+                          <a:spcPts val="0"/>
+                        </a:spcAft>
+                      </a:pPr>
+                      <a:r>
+                        <a:rPr sz="1150" b="0">
+                          <a:solidFill>
+                            <a:srgbClr val="1B222E"/>
+                          </a:solidFill>
+                          <a:latin typeface="微软雅黑"/>
+                          <a:ea typeface="微软雅黑"/>
+                        </a:rPr>
+                        <a:t>换取图可复用的代价</a:t>
+                      </a:r>
+                    </a:p>
+                  </a:txBody>
+                  <a:tcPr marL="64008" marR="64008" marT="18288" marB="18288">
+                    <a:solidFill>
+                      <a:srgbClr val="FFFFFF"/>
+                    </a:solidFill>
+                  </a:tcPr>
+                </a:tc>
+              </a:tr>
+            </a:tbl>
+          </a:graphicData>
+        </a:graphic>
+      </p:graphicFrame>
       <p:sp>
         <p:nvSpPr>
-          <p:cNvPr id="5" name="TextBox 4"/>
+          <p:cNvPr id="6" name="TextBox 5"/>
           <p:cNvSpPr txBox="1"/>
           <p:nvPr/>
         </p:nvSpPr>
         <p:spPr>
           <a:xfrm>
-            <a:off x="566928" y="3520440"/>
-            <a:ext cx="11064240" cy="2743200"/>
+            <a:off x="502920" y="5806440"/>
+            <a:ext cx="11247120" cy="822960"/>
           </a:xfrm>
           <a:prstGeom prst="rect">
             <a:avLst/>
@@ -4696,66 +6737,14 @@
               </a:spcAft>
             </a:pPr>
             <a:r>
-              <a:rPr sz="1600" b="0" i="0">
-                <a:solidFill>
-                  <a:srgbClr val="0E7A4B"/>
-                </a:solidFill>
-              </a:rPr>
-              <a:t>Static K: the total token count is constant every round → cache hits → no cost.</a:t>
-            </a:r>
-          </a:p>
-          <a:p>
-            <a:pPr algn="l">
-              <a:spcBef>
-                <a:spcPts val="800"/>
-              </a:spcBef>
-              <a:spcAft>
-                <a:spcPts val="0"/>
-              </a:spcAft>
-            </a:pPr>
-            <a:r>
-              <a:rPr sz="1600" b="0" i="0">
-                <a:solidFill>
-                  <a:srgbClr val="B45309"/>
-                </a:solidFill>
-              </a:rPr>
-              <a:t>Adaptive K_i: the total changes every round → a miss every round → _get_max_workspace is called per layer, per step.</a:t>
-            </a:r>
-          </a:p>
-          <a:p>
-            <a:pPr algn="l">
-              <a:spcBef>
-                <a:spcPts val="800"/>
-              </a:spcBef>
-              <a:spcAft>
-                <a:spcPts val="0"/>
-              </a:spcAft>
-            </a:pPr>
-            <a:r>
-              <a:rPr sz="1500" b="0" i="0">
-                <a:solidFill>
-                  <a:srgbClr val="1B222E"/>
-                </a:solidFill>
-              </a:rPr>
-              <a:t>A second path is more expensive still: when _use_max_workspace_for_fia_graph is set, the query runs unconditionally on every call so the largest workspace across layer variants can be kept.</a:t>
-            </a:r>
-          </a:p>
-          <a:p>
-            <a:pPr algn="l">
-              <a:spcBef>
-                <a:spcPts val="1200"/>
-              </a:spcBef>
-              <a:spcAft>
-                <a:spcPts val="0"/>
-              </a:spcAft>
-            </a:pPr>
-            <a:r>
-              <a:rPr sz="1600" b="1" i="0">
+              <a:rPr sz="1500" b="1">
                 <a:solidFill>
                   <a:srgbClr val="1F6FEB"/>
                 </a:solidFill>
+                <a:latin typeface="微软雅黑"/>
+                <a:ea typeface="微软雅黑"/>
               </a:rPr>
-              <a:t>Mitigation is structural, not a micro-optimisation: key the cache by a bucket (batch bucket × total-verify-token bucket) rather than the exact token count, and pre-allocate at capture time.</a:t>
+              <a:t>修法是结构性的:缓存键与图键都改为 (batch bucket × 总验证 token bucket),捕图阶段一次性预分配 workspace。</a:t>
             </a:r>
           </a:p>
         </p:txBody>
@@ -4794,8 +6783,8 @@
         </p:nvSpPr>
         <p:spPr>
           <a:xfrm>
-            <a:off x="566928" y="384048"/>
-            <a:ext cx="11064240" cy="914400"/>
+            <a:off x="502920" y="274320"/>
+            <a:ext cx="11247120" cy="868680"/>
           </a:xfrm>
           <a:prstGeom prst="rect">
             <a:avLst/>
@@ -4817,30 +6806,34 @@
               </a:spcAft>
             </a:pPr>
             <a:r>
-              <a:rPr sz="2800" b="1" i="0">
+              <a:rPr sz="2500" b="1">
                 <a:solidFill>
                   <a:srgbClr val="1B222E"/>
                 </a:solidFill>
+                <a:latin typeface="微软雅黑"/>
+                <a:ea typeface="微软雅黑"/>
               </a:rPr>
-              <a:t>Where the extra cost actually comes from</a:t>
+              <a:t>适配清单 —— 两条路线分开推进</a:t>
             </a:r>
           </a:p>
           <a:p>
             <a:pPr algn="l">
               <a:spcBef>
-                <a:spcPts val="400"/>
+                <a:spcPts val="300"/>
               </a:spcBef>
               <a:spcAft>
                 <a:spcPts val="0"/>
               </a:spcAft>
             </a:pPr>
             <a:r>
-              <a:rPr sz="1350" b="0" i="0">
+              <a:rPr sz="1200" b="0">
                 <a:solidFill>
                   <a:srgbClr val="5B6677"/>
                 </a:solidFill>
+                <a:latin typeface="微软雅黑"/>
+                <a:ea typeface="微软雅黑"/>
               </a:rPr>
-              <a:t>Per decode step, relative to a static-K full graph</a:t>
+              <a:t>共用项做一次,路线项各自解决</a:t>
             </a:r>
           </a:p>
         </p:txBody>
@@ -4853,8 +6846,8 @@
         </p:nvSpPr>
         <p:spPr>
           <a:xfrm>
-            <a:off x="566928" y="1298448"/>
-            <a:ext cx="1371600" cy="26000"/>
+            <a:off x="502920" y="1115568"/>
+            <a:ext cx="1188720" cy="24000"/>
           </a:xfrm>
           <a:prstGeom prst="rect">
             <a:avLst/>
@@ -4898,8 +6891,8 @@
           <p:nvPr/>
         </p:nvGraphicFramePr>
         <p:xfrm>
-          <a:off x="566928" y="1645920"/>
-          <a:ext cx="11064238" cy="2523744"/>
+          <a:off x="502920" y="1572768"/>
+          <a:ext cx="11247118" cy="3566160"/>
         </p:xfrm>
         <a:graphic>
           <a:graphicData uri="http://schemas.openxmlformats.org/drawingml/2006/table">
@@ -4908,28 +6901,38 @@
                 <a:tableStyleId>{5C22544A-7EE6-4342-B048-85BDC9FD1C3A}</a:tableStyleId>
               </a:tblPr>
               <a:tblGrid>
-                <a:gridCol w="2655417"/>
-                <a:gridCol w="1548993"/>
-                <a:gridCol w="2876702"/>
-                <a:gridCol w="3983126"/>
+                <a:gridCol w="1124712"/>
+                <a:gridCol w="3599078"/>
+                <a:gridCol w="3261664"/>
+                <a:gridCol w="3261664"/>
               </a:tblGrid>
-              <a:tr h="420624">
-                <a:tc>
-                  <a:txBody>
-                    <a:bodyPr wrap="square"/>
-                    <a:lstStyle/>
-                    <a:p>
-                      <a:r>
-                        <a:rPr sz="1250" b="1">
-                          <a:solidFill>
-                            <a:srgbClr val="1B222E"/>
-                          </a:solidFill>
-                        </a:rPr>
-                        <a:t>Source</a:t>
-                      </a:r>
-                    </a:p>
-                  </a:txBody>
-                  <a:tcPr marL="73152" marR="54864" marT="27432" marB="27432">
+              <a:tr h="1188720">
+                <a:tc>
+                  <a:txBody>
+                    <a:bodyPr wrap="square"/>
+                    <a:lstStyle/>
+                    <a:p>
+                      <a:pPr>
+                        <a:spcBef>
+                          <a:spcPts val="0"/>
+                        </a:spcBef>
+                        <a:spcAft>
+                          <a:spcPts val="0"/>
+                        </a:spcAft>
+                      </a:pPr>
+                      <a:r>
+                        <a:rPr sz="1150" b="1">
+                          <a:solidFill>
+                            <a:srgbClr val="1B222E"/>
+                          </a:solidFill>
+                          <a:latin typeface="微软雅黑"/>
+                          <a:ea typeface="微软雅黑"/>
+                        </a:rPr>
+                        <a:t/>
+                      </a:r>
+                    </a:p>
+                  </a:txBody>
+                  <a:tcPr marL="64008" marR="64008" marT="18288" marB="18288">
                     <a:solidFill>
                       <a:srgbClr val="F2F5F9"/>
                     </a:solidFill>
@@ -4940,17 +6943,27 @@
                     <a:bodyPr wrap="square"/>
                     <a:lstStyle/>
                     <a:p>
-                      <a:r>
-                        <a:rPr sz="1250" b="1">
-                          <a:solidFill>
-                            <a:srgbClr val="1B222E"/>
-                          </a:solidFill>
-                        </a:rPr>
-                        <a:t>Static K</a:t>
-                      </a:r>
-                    </a:p>
-                  </a:txBody>
-                  <a:tcPr marL="73152" marR="54864" marT="27432" marB="27432">
+                      <a:pPr>
+                        <a:spcBef>
+                          <a:spcPts val="0"/>
+                        </a:spcBef>
+                        <a:spcAft>
+                          <a:spcPts val="0"/>
+                        </a:spcAft>
+                      </a:pPr>
+                      <a:r>
+                        <a:rPr sz="1150" b="1">
+                          <a:solidFill>
+                            <a:srgbClr val="1B222E"/>
+                          </a:solidFill>
+                          <a:latin typeface="微软雅黑"/>
+                          <a:ea typeface="微软雅黑"/>
+                        </a:rPr>
+                        <a:t>共用(先做)</a:t>
+                      </a:r>
+                    </a:p>
+                  </a:txBody>
+                  <a:tcPr marL="64008" marR="64008" marT="18288" marB="18288">
                     <a:solidFill>
                       <a:srgbClr val="F2F5F9"/>
                     </a:solidFill>
@@ -4961,17 +6974,27 @@
                     <a:bodyPr wrap="square"/>
                     <a:lstStyle/>
                     <a:p>
-                      <a:r>
-                        <a:rPr sz="1250" b="1">
-                          <a:solidFill>
-                            <a:srgbClr val="1B222E"/>
-                          </a:solidFill>
-                        </a:rPr>
-                        <a:t>Adaptive K_i</a:t>
-                      </a:r>
-                    </a:p>
-                  </a:txBody>
-                  <a:tcPr marL="73152" marR="54864" marT="27432" marB="27432">
+                      <a:pPr>
+                        <a:spcBef>
+                          <a:spcPts val="0"/>
+                        </a:spcBef>
+                        <a:spcAft>
+                          <a:spcPts val="0"/>
+                        </a:spcAft>
+                      </a:pPr>
+                      <a:r>
+                        <a:rPr sz="1150" b="1">
+                          <a:solidFill>
+                            <a:srgbClr val="1B222E"/>
+                          </a:solidFill>
+                          <a:latin typeface="微软雅黑"/>
+                          <a:ea typeface="微软雅黑"/>
+                        </a:rPr>
+                        <a:t>DSV4 / DSA 路线</a:t>
+                      </a:r>
+                    </a:p>
+                  </a:txBody>
+                  <a:tcPr marL="64008" marR="64008" marT="18288" marB="18288">
                     <a:solidFill>
                       <a:srgbClr val="F2F5F9"/>
                     </a:solidFill>
@@ -4982,40 +7005,60 @@
                     <a:bodyPr wrap="square"/>
                     <a:lstStyle/>
                     <a:p>
-                      <a:r>
-                        <a:rPr sz="1250" b="1">
-                          <a:solidFill>
-                            <a:srgbClr val="1B222E"/>
-                          </a:solidFill>
-                        </a:rPr>
-                        <a:t>Comment</a:t>
-                      </a:r>
-                    </a:p>
-                  </a:txBody>
-                  <a:tcPr marL="73152" marR="54864" marT="27432" marB="27432">
+                      <a:pPr>
+                        <a:spcBef>
+                          <a:spcPts val="0"/>
+                        </a:spcBef>
+                        <a:spcAft>
+                          <a:spcPts val="0"/>
+                        </a:spcAft>
+                      </a:pPr>
+                      <a:r>
+                        <a:rPr sz="1150" b="1">
+                          <a:solidFill>
+                            <a:srgbClr val="1B222E"/>
+                          </a:solidFill>
+                          <a:latin typeface="微软雅黑"/>
+                          <a:ea typeface="微软雅黑"/>
+                        </a:rPr>
+                        <a:t>通用 / FIA 路线</a:t>
+                      </a:r>
+                    </a:p>
+                  </a:txBody>
+                  <a:tcPr marL="64008" marR="64008" marT="18288" marB="18288">
                     <a:solidFill>
                       <a:srgbClr val="F2F5F9"/>
                     </a:solidFill>
                   </a:tcPr>
                 </a:tc>
               </a:tr>
-              <a:tr h="420624">
-                <a:tc>
-                  <a:txBody>
-                    <a:bodyPr wrap="square"/>
-                    <a:lstStyle/>
-                    <a:p>
-                      <a:r>
-                        <a:rPr sz="1250" b="0">
-                          <a:solidFill>
-                            <a:srgbClr val="1B222E"/>
-                          </a:solidFill>
-                        </a:rPr>
-                        <a:t>FIA workspace query</a:t>
-                      </a:r>
-                    </a:p>
-                  </a:txBody>
-                  <a:tcPr marL="73152" marR="54864" marT="27432" marB="27432">
+              <a:tr h="1188720">
+                <a:tc>
+                  <a:txBody>
+                    <a:bodyPr wrap="square"/>
+                    <a:lstStyle/>
+                    <a:p>
+                      <a:pPr>
+                        <a:spcBef>
+                          <a:spcPts val="0"/>
+                        </a:spcBef>
+                        <a:spcAft>
+                          <a:spcPts val="0"/>
+                        </a:spcAft>
+                      </a:pPr>
+                      <a:r>
+                        <a:rPr sz="1150" b="0">
+                          <a:solidFill>
+                            <a:srgbClr val="1B222E"/>
+                          </a:solidFill>
+                          <a:latin typeface="微软雅黑"/>
+                          <a:ea typeface="微软雅黑"/>
+                        </a:rPr>
+                        <a:t>工作项</a:t>
+                      </a:r>
+                    </a:p>
+                  </a:txBody>
+                  <a:tcPr marL="64008" marR="64008" marT="18288" marB="18288">
                     <a:solidFill>
                       <a:srgbClr val="FFFFFF"/>
                     </a:solidFill>
@@ -5026,17 +7069,87 @@
                     <a:bodyPr wrap="square"/>
                     <a:lstStyle/>
                     <a:p>
-                      <a:r>
-                        <a:rPr sz="1250" b="0">
-                          <a:solidFill>
-                            <a:srgbClr val="1B222E"/>
-                          </a:solidFill>
-                        </a:rPr>
-                        <a:t>cached</a:t>
-                      </a:r>
-                    </a:p>
-                  </a:txBody>
-                  <a:tcPr marL="73152" marR="54864" marT="27432" marB="27432">
+                      <a:pPr>
+                        <a:spcBef>
+                          <a:spcPts val="0"/>
+                        </a:spcBef>
+                        <a:spcAft>
+                          <a:spcPts val="0"/>
+                        </a:spcAft>
+                      </a:pPr>
+                      <a:r>
+                        <a:rPr sz="1150" b="0">
+                          <a:solidFill>
+                            <a:srgbClr val="1B222E"/>
+                          </a:solidFill>
+                          <a:latin typeface="微软雅黑"/>
+                          <a:ea typeface="微软雅黑"/>
+                        </a:rPr>
+                        <a:t>· workspace 与图键改为 bucket</a:t>
+                      </a:r>
+                    </a:p>
+                    <a:p>
+                      <a:pPr>
+                        <a:spcBef>
+                          <a:spcPts val="0"/>
+                        </a:spcBef>
+                        <a:spcAft>
+                          <a:spcPts val="0"/>
+                        </a:spcAft>
+                      </a:pPr>
+                      <a:r>
+                        <a:rPr sz="1150" b="0">
+                          <a:solidFill>
+                            <a:srgbClr val="1B222E"/>
+                          </a:solidFill>
+                          <a:latin typeface="微软雅黑"/>
+                          <a:ea typeface="微软雅黑"/>
+                        </a:rPr>
+                        <a:t>· 捕图期预分配并长期复用</a:t>
+                      </a:r>
+                    </a:p>
+                    <a:p>
+                      <a:pPr>
+                        <a:spcBef>
+                          <a:spcPts val="0"/>
+                        </a:spcBef>
+                        <a:spcAft>
+                          <a:spcPts val="0"/>
+                        </a:spcAft>
+                      </a:pPr>
+                      <a:r>
+                        <a:rPr sz="1150" b="0">
+                          <a:solidFill>
+                            <a:srgbClr val="1B222E"/>
+                          </a:solidFill>
+                          <a:latin typeface="微软雅黑"/>
+                          <a:ea typeface="微软雅黑"/>
+                        </a:rPr>
+                        <a:t>· K_i→有效 token 的 compaction 全留设备</a:t>
+                      </a:r>
+                    </a:p>
+                    <a:p>
+                      <a:pPr>
+                        <a:spcBef>
+                          <a:spcPts val="0"/>
+                        </a:spcBef>
+                        <a:spcAft>
+                          <a:spcPts val="0"/>
+                        </a:spcAft>
+                      </a:pPr>
+                      <a:r>
+                        <a:rPr sz="1150" b="0">
+                          <a:solidFill>
+                            <a:srgbClr val="1B222E"/>
+                          </a:solidFill>
+                          <a:latin typeface="微软雅黑"/>
+                          <a:ea typeface="微软雅黑"/>
+                        </a:rPr>
+                        <a:t>· 审计 .cpu() / .tolist() / 隐式 D2H</a:t>
+                      </a:r>
+                    </a:p>
+                  </a:txBody>
+                  <a:tcPr marL="64008" marR="64008" marT="18288" marB="18288">
                     <a:solidFill>
                       <a:srgbClr val="FFFFFF"/>
                     </a:solidFill>
@@ -5047,17 +7160,87 @@
                     <a:bodyPr wrap="square"/>
                     <a:lstStyle/>
                     <a:p>
-                      <a:r>
-                        <a:rPr sz="1250" b="0">
-                          <a:solidFill>
-                            <a:srgbClr val="1B222E"/>
-                          </a:solidFill>
-                        </a:rPr>
-                        <a:t>miss per round, per layer</a:t>
-                      </a:r>
-                    </a:p>
-                  </a:txBody>
-                  <a:tcPr marL="73152" marR="54864" marT="27432" marB="27432">
+                      <a:pPr>
+                        <a:spcBef>
+                          <a:spcPts val="0"/>
+                        </a:spcBef>
+                        <a:spcAft>
+                          <a:spcPts val="0"/>
+                        </a:spcAft>
+                      </a:pPr>
+                      <a:r>
+                        <a:rPr sz="1150" b="0">
+                          <a:solidFill>
+                            <a:srgbClr val="1B222E"/>
+                          </a:solidFill>
+                          <a:latin typeface="微软雅黑"/>
+                          <a:ea typeface="微软雅黑"/>
+                        </a:rPr>
+                        <a:t>· 直接复用现有设备张量长度</a:t>
+                      </a:r>
+                    </a:p>
+                    <a:p>
+                      <a:pPr>
+                        <a:spcBef>
+                          <a:spcPts val="0"/>
+                        </a:spcBef>
+                        <a:spcAft>
+                          <a:spcPts val="0"/>
+                        </a:spcAft>
+                      </a:pPr>
+                      <a:r>
+                        <a:rPr sz="1150" b="0">
+                          <a:solidFill>
+                            <a:srgbClr val="1B222E"/>
+                          </a:solidFill>
+                          <a:latin typeface="微软雅黑"/>
+                          <a:ea typeface="微软雅黑"/>
+                        </a:rPr>
+                        <a:t>· 验证 indexer/SAS 在变长下的</a:t>
+                      </a:r>
+                    </a:p>
+                    <a:p>
+                      <a:pPr>
+                        <a:spcBef>
+                          <a:spcPts val="0"/>
+                        </a:spcBef>
+                        <a:spcAft>
+                          <a:spcPts val="0"/>
+                        </a:spcAft>
+                      </a:pPr>
+                      <a:r>
+                        <a:rPr sz="1150" b="0">
+                          <a:solidFill>
+                            <a:srgbClr val="1B222E"/>
+                          </a:solidFill>
+                          <a:latin typeface="微软雅黑"/>
+                          <a:ea typeface="微软雅黑"/>
+                        </a:rPr>
+                        <a:t>  metadata 复用</a:t>
+                      </a:r>
+                    </a:p>
+                    <a:p>
+                      <a:pPr>
+                        <a:spcBef>
+                          <a:spcPts val="0"/>
+                        </a:spcBef>
+                        <a:spcAft>
+                          <a:spcPts val="0"/>
+                        </a:spcAft>
+                      </a:pPr>
+                      <a:r>
+                        <a:rPr sz="1150" b="0">
+                          <a:solidFill>
+                            <a:srgbClr val="1B222E"/>
+                          </a:solidFill>
+                          <a:latin typeface="微软雅黑"/>
+                          <a:ea typeface="微软雅黑"/>
+                        </a:rPr>
+                        <a:t>· 端到端跑通并计时</a:t>
+                      </a:r>
+                    </a:p>
+                  </a:txBody>
+                  <a:tcPr marL="64008" marR="64008" marT="18288" marB="18288">
                     <a:solidFill>
                       <a:srgbClr val="FFFFFF"/>
                     </a:solidFill>
@@ -5068,40 +7251,120 @@
                     <a:bodyPr wrap="square"/>
                     <a:lstStyle/>
                     <a:p>
-                      <a:r>
-                        <a:rPr sz="1250" b="0">
-                          <a:solidFill>
-                            <a:srgbClr val="1B222E"/>
-                          </a:solidFill>
-                        </a:rPr>
-                        <a:t>cache key = total token count</a:t>
-                      </a:r>
-                    </a:p>
-                  </a:txBody>
-                  <a:tcPr marL="73152" marR="54864" marT="27432" marB="27432">
+                      <a:pPr>
+                        <a:spcBef>
+                          <a:spcPts val="0"/>
+                        </a:spcBef>
+                        <a:spcAft>
+                          <a:spcPts val="0"/>
+                        </a:spcAft>
+                      </a:pPr>
+                      <a:r>
+                        <a:rPr sz="1150" b="0">
+                          <a:solidFill>
+                            <a:srgbClr val="1B222E"/>
+                          </a:solidFill>
+                          <a:latin typeface="微软雅黑"/>
+                          <a:ea typeface="微软雅黑"/>
+                        </a:rPr>
+                        <a:t>· FIA v2 接受设备张量长度</a:t>
+                      </a:r>
+                    </a:p>
+                    <a:p>
+                      <a:pPr>
+                        <a:spcBef>
+                          <a:spcPts val="0"/>
+                        </a:spcBef>
+                        <a:spcAft>
+                          <a:spcPts val="0"/>
+                        </a:spcAft>
+                      </a:pPr>
+                      <a:r>
+                        <a:rPr sz="1150" b="0">
+                          <a:solidFill>
+                            <a:srgbClr val="1B222E"/>
+                          </a:solidFill>
+                          <a:latin typeface="微软雅黑"/>
+                          <a:ea typeface="微软雅黑"/>
+                        </a:rPr>
+                        <a:t>  (算子层改动,或等上游)</a:t>
+                      </a:r>
+                    </a:p>
+                    <a:p>
+                      <a:pPr>
+                        <a:spcBef>
+                          <a:spcPts val="0"/>
+                        </a:spcBef>
+                        <a:spcAft>
+                          <a:spcPts val="0"/>
+                        </a:spcAft>
+                      </a:pPr>
+                      <a:r>
+                        <a:rPr sz="1150" b="0">
+                          <a:solidFill>
+                            <a:srgbClr val="1B222E"/>
+                          </a:solidFill>
+                          <a:latin typeface="微软雅黑"/>
+                          <a:ea typeface="微软雅黑"/>
+                        </a:rPr>
+                        <a:t>· 否则按 bucket 摊薄 host metadata</a:t>
+                      </a:r>
+                    </a:p>
+                    <a:p>
+                      <a:pPr>
+                        <a:spcBef>
+                          <a:spcPts val="0"/>
+                        </a:spcBef>
+                        <a:spcAft>
+                          <a:spcPts val="0"/>
+                        </a:spcAft>
+                      </a:pPr>
+                      <a:r>
+                        <a:rPr sz="1150" b="0">
+                          <a:solidFill>
+                            <a:srgbClr val="1B222E"/>
+                          </a:solidFill>
+                          <a:latin typeface="微软雅黑"/>
+                          <a:ea typeface="微软雅黑"/>
+                        </a:rPr>
+                        <a:t>· 对齐 #48692 的变长兼容标志</a:t>
+                      </a:r>
+                    </a:p>
+                  </a:txBody>
+                  <a:tcPr marL="64008" marR="64008" marT="18288" marB="18288">
                     <a:solidFill>
                       <a:srgbClr val="FFFFFF"/>
                     </a:solidFill>
                   </a:tcPr>
                 </a:tc>
               </a:tr>
-              <a:tr h="420624">
-                <a:tc>
-                  <a:txBody>
-                    <a:bodyPr wrap="square"/>
-                    <a:lstStyle/>
-                    <a:p>
-                      <a:r>
-                        <a:rPr sz="1250" b="0">
-                          <a:solidFill>
-                            <a:srgbClr val="1B222E"/>
-                          </a:solidFill>
-                        </a:rPr>
-                        <a:t>Graph task update</a:t>
-                      </a:r>
-                    </a:p>
-                  </a:txBody>
-                  <a:tcPr marL="73152" marR="54864" marT="27432" marB="27432">
+              <a:tr h="1188720">
+                <a:tc>
+                  <a:txBody>
+                    <a:bodyPr wrap="square"/>
+                    <a:lstStyle/>
+                    <a:p>
+                      <a:pPr>
+                        <a:spcBef>
+                          <a:spcPts val="0"/>
+                        </a:spcBef>
+                        <a:spcAft>
+                          <a:spcPts val="0"/>
+                        </a:spcAft>
+                      </a:pPr>
+                      <a:r>
+                        <a:rPr sz="1150" b="0">
+                          <a:solidFill>
+                            <a:srgbClr val="1B222E"/>
+                          </a:solidFill>
+                          <a:latin typeface="微软雅黑"/>
+                          <a:ea typeface="微软雅黑"/>
+                        </a:rPr>
+                        <a:t>难度</a:t>
+                      </a:r>
+                    </a:p>
+                  </a:txBody>
+                  <a:tcPr marL="64008" marR="64008" marT="18288" marB="18288">
                     <a:solidFill>
                       <a:srgbClr val="FFFFFF"/>
                     </a:solidFill>
@@ -5112,17 +7375,27 @@
                     <a:bodyPr wrap="square"/>
                     <a:lstStyle/>
                     <a:p>
-                      <a:r>
-                        <a:rPr sz="1250" b="0">
-                          <a:solidFill>
-                            <a:srgbClr val="1B222E"/>
-                          </a:solidFill>
-                        </a:rPr>
-                        <a:t>per layer</a:t>
-                      </a:r>
-                    </a:p>
-                  </a:txBody>
-                  <a:tcPr marL="73152" marR="54864" marT="27432" marB="27432">
+                      <a:pPr>
+                        <a:spcBef>
+                          <a:spcPts val="0"/>
+                        </a:spcBef>
+                        <a:spcAft>
+                          <a:spcPts val="0"/>
+                        </a:spcAft>
+                      </a:pPr>
+                      <a:r>
+                        <a:rPr sz="1150" b="0">
+                          <a:solidFill>
+                            <a:srgbClr val="1B222E"/>
+                          </a:solidFill>
+                          <a:latin typeface="微软雅黑"/>
+                          <a:ea typeface="微软雅黑"/>
+                        </a:rPr>
+                        <a:t>中</a:t>
+                      </a:r>
+                    </a:p>
+                  </a:txBody>
+                  <a:tcPr marL="64008" marR="64008" marT="18288" marB="18288">
                     <a:solidFill>
                       <a:srgbClr val="FFFFFF"/>
                     </a:solidFill>
@@ -5133,17 +7406,27 @@
                     <a:bodyPr wrap="square"/>
                     <a:lstStyle/>
                     <a:p>
-                      <a:r>
-                        <a:rPr sz="1250" b="0">
-                          <a:solidFill>
-                            <a:srgbClr val="1B222E"/>
-                          </a:solidFill>
-                        </a:rPr>
-                        <a:t>per layer</a:t>
-                      </a:r>
-                    </a:p>
-                  </a:txBody>
-                  <a:tcPr marL="73152" marR="54864" marT="27432" marB="27432">
+                      <a:pPr>
+                        <a:spcBef>
+                          <a:spcPts val="0"/>
+                        </a:spcBef>
+                        <a:spcAft>
+                          <a:spcPts val="0"/>
+                        </a:spcAft>
+                      </a:pPr>
+                      <a:r>
+                        <a:rPr sz="1150" b="0">
+                          <a:solidFill>
+                            <a:srgbClr val="0E7A4B"/>
+                          </a:solidFill>
+                          <a:latin typeface="微软雅黑"/>
+                          <a:ea typeface="微软雅黑"/>
+                        </a:rPr>
+                        <a:t>低 —— 前置条件已满足</a:t>
+                      </a:r>
+                    </a:p>
+                  </a:txBody>
+                  <a:tcPr marL="64008" marR="64008" marT="18288" marB="18288">
                     <a:solidFill>
                       <a:srgbClr val="FFFFFF"/>
                     </a:solidFill>
@@ -5154,275 +7437,27 @@
                     <a:bodyPr wrap="square"/>
                     <a:lstStyle/>
                     <a:p>
-                      <a:r>
-                        <a:rPr sz="1250" b="0">
-                          <a:solidFill>
-                            <a:srgbClr val="1B222E"/>
-                          </a:solidFill>
-                        </a:rPr>
-                        <a:t>graph_task_update_begin / …_end already exists</a:t>
-                      </a:r>
-                    </a:p>
-                  </a:txBody>
-                  <a:tcPr marL="73152" marR="54864" marT="27432" marB="27432">
-                    <a:solidFill>
-                      <a:srgbClr val="FFFFFF"/>
-                    </a:solidFill>
-                  </a:tcPr>
-                </a:tc>
-              </a:tr>
-              <a:tr h="420624">
-                <a:tc>
-                  <a:txBody>
-                    <a:bodyPr wrap="square"/>
-                    <a:lstStyle/>
-                    <a:p>
-                      <a:r>
-                        <a:rPr sz="1250" b="0">
-                          <a:solidFill>
-                            <a:srgbClr val="1B222E"/>
-                          </a:solidFill>
-                        </a:rPr>
-                        <a:t>Host metadata</a:t>
-                      </a:r>
-                    </a:p>
-                  </a:txBody>
-                  <a:tcPr marL="73152" marR="54864" marT="27432" marB="27432">
-                    <a:solidFill>
-                      <a:srgbClr val="FFFFFF"/>
-                    </a:solidFill>
-                  </a:tcPr>
-                </a:tc>
-                <a:tc>
-                  <a:txBody>
-                    <a:bodyPr wrap="square"/>
-                    <a:lstStyle/>
-                    <a:p>
-                      <a:r>
-                        <a:rPr sz="1250" b="0">
-                          <a:solidFill>
-                            <a:srgbClr val="1B222E"/>
-                          </a:solidFill>
-                        </a:rPr>
-                        <a:t>small</a:t>
-                      </a:r>
-                    </a:p>
-                  </a:txBody>
-                  <a:tcPr marL="73152" marR="54864" marT="27432" marB="27432">
-                    <a:solidFill>
-                      <a:srgbClr val="FFFFFF"/>
-                    </a:solidFill>
-                  </a:tcPr>
-                </a:tc>
-                <a:tc>
-                  <a:txBody>
-                    <a:bodyPr wrap="square"/>
-                    <a:lstStyle/>
-                    <a:p>
-                      <a:r>
-                        <a:rPr sz="1250" b="0">
-                          <a:solidFill>
-                            <a:srgbClr val="1B222E"/>
-                          </a:solidFill>
-                        </a:rPr>
-                        <a:t>grows with ragged batch</a:t>
-                      </a:r>
-                    </a:p>
-                  </a:txBody>
-                  <a:tcPr marL="73152" marR="54864" marT="27432" marB="27432">
-                    <a:solidFill>
-                      <a:srgbClr val="FFFFFF"/>
-                    </a:solidFill>
-                  </a:tcPr>
-                </a:tc>
-                <a:tc>
-                  <a:txBody>
-                    <a:bodyPr wrap="square"/>
-                    <a:lstStyle/>
-                    <a:p>
-                      <a:r>
-                        <a:rPr sz="1250" b="0">
-                          <a:solidFill>
-                            <a:srgbClr val="1B222E"/>
-                          </a:solidFill>
-                        </a:rPr>
-                        <a:t>FIA path builds lengths on host</a:t>
-                      </a:r>
-                    </a:p>
-                  </a:txBody>
-                  <a:tcPr marL="73152" marR="54864" marT="27432" marB="27432">
-                    <a:solidFill>
-                      <a:srgbClr val="FFFFFF"/>
-                    </a:solidFill>
-                  </a:tcPr>
-                </a:tc>
-              </a:tr>
-              <a:tr h="420624">
-                <a:tc>
-                  <a:txBody>
-                    <a:bodyPr wrap="square"/>
-                    <a:lstStyle/>
-                    <a:p>
-                      <a:r>
-                        <a:rPr sz="1250" b="0">
-                          <a:solidFill>
-                            <a:srgbClr val="1B222E"/>
-                          </a:solidFill>
-                        </a:rPr>
-                        <a:t>Padding waste</a:t>
-                      </a:r>
-                    </a:p>
-                  </a:txBody>
-                  <a:tcPr marL="73152" marR="54864" marT="27432" marB="27432">
-                    <a:solidFill>
-                      <a:srgbClr val="FFFFFF"/>
-                    </a:solidFill>
-                  </a:tcPr>
-                </a:tc>
-                <a:tc>
-                  <a:txBody>
-                    <a:bodyPr wrap="square"/>
-                    <a:lstStyle/>
-                    <a:p>
-                      <a:r>
-                        <a:rPr sz="1250" b="0">
-                          <a:solidFill>
-                            <a:srgbClr val="1B222E"/>
-                          </a:solidFill>
-                        </a:rPr>
-                        <a:t>none</a:t>
-                      </a:r>
-                    </a:p>
-                  </a:txBody>
-                  <a:tcPr marL="73152" marR="54864" marT="27432" marB="27432">
-                    <a:solidFill>
-                      <a:srgbClr val="FFFFFF"/>
-                    </a:solidFill>
-                  </a:tcPr>
-                </a:tc>
-                <a:tc>
-                  <a:txBody>
-                    <a:bodyPr wrap="square"/>
-                    <a:lstStyle/>
-                    <a:p>
-                      <a:r>
-                        <a:rPr sz="1250" b="0">
-                          <a:solidFill>
-                            <a:srgbClr val="1B222E"/>
-                          </a:solidFill>
-                        </a:rPr>
-                        <a:t>depends on bucket width</a:t>
-                      </a:r>
-                    </a:p>
-                  </a:txBody>
-                  <a:tcPr marL="73152" marR="54864" marT="27432" marB="27432">
-                    <a:solidFill>
-                      <a:srgbClr val="FFFFFF"/>
-                    </a:solidFill>
-                  </a:tcPr>
-                </a:tc>
-                <a:tc>
-                  <a:txBody>
-                    <a:bodyPr wrap="square"/>
-                    <a:lstStyle/>
-                    <a:p>
-                      <a:r>
-                        <a:rPr sz="1250" b="0">
-                          <a:solidFill>
-                            <a:srgbClr val="1B222E"/>
-                          </a:solidFill>
-                        </a:rPr>
-                        <a:t>the price of a reusable graph</a:t>
-                      </a:r>
-                    </a:p>
-                  </a:txBody>
-                  <a:tcPr marL="73152" marR="54864" marT="27432" marB="27432">
-                    <a:solidFill>
-                      <a:srgbClr val="FFFFFF"/>
-                    </a:solidFill>
-                  </a:tcPr>
-                </a:tc>
-              </a:tr>
-              <a:tr h="420624">
-                <a:tc>
-                  <a:txBody>
-                    <a:bodyPr wrap="square"/>
-                    <a:lstStyle/>
-                    <a:p>
-                      <a:r>
-                        <a:rPr sz="1250" b="0">
-                          <a:solidFill>
-                            <a:srgbClr val="1B222E"/>
-                          </a:solidFill>
-                        </a:rPr>
-                        <a:t>Target compute saved</a:t>
-                      </a:r>
-                    </a:p>
-                  </a:txBody>
-                  <a:tcPr marL="73152" marR="54864" marT="27432" marB="27432">
-                    <a:solidFill>
-                      <a:srgbClr val="FFFFFF"/>
-                    </a:solidFill>
-                  </a:tcPr>
-                </a:tc>
-                <a:tc>
-                  <a:txBody>
-                    <a:bodyPr wrap="square"/>
-                    <a:lstStyle/>
-                    <a:p>
-                      <a:r>
-                        <a:rPr sz="1250" b="0">
-                          <a:solidFill>
-                            <a:srgbClr val="1B222E"/>
-                          </a:solidFill>
-                        </a:rPr>
-                        <a:t>—</a:t>
-                      </a:r>
-                    </a:p>
-                  </a:txBody>
-                  <a:tcPr marL="73152" marR="54864" marT="27432" marB="27432">
-                    <a:solidFill>
-                      <a:srgbClr val="FFFFFF"/>
-                    </a:solidFill>
-                  </a:tcPr>
-                </a:tc>
-                <a:tc>
-                  <a:txBody>
-                    <a:bodyPr wrap="square"/>
-                    <a:lstStyle/>
-                    <a:p>
-                      <a:r>
-                        <a:rPr sz="1250" b="0">
-                          <a:solidFill>
-                            <a:srgbClr val="1B222E"/>
-                          </a:solidFill>
-                        </a:rPr>
-                        <a:t>the entire point</a:t>
-                      </a:r>
-                    </a:p>
-                  </a:txBody>
-                  <a:tcPr marL="73152" marR="54864" marT="27432" marB="27432">
-                    <a:solidFill>
-                      <a:srgbClr val="FFFFFF"/>
-                    </a:solidFill>
-                  </a:tcPr>
-                </a:tc>
-                <a:tc>
-                  <a:txBody>
-                    <a:bodyPr wrap="square"/>
-                    <a:lstStyle/>
-                    <a:p>
-                      <a:r>
-                        <a:rPr sz="1250" b="0">
-                          <a:solidFill>
-                            <a:srgbClr val="1B222E"/>
-                          </a:solidFill>
-                        </a:rPr>
-                        <a:t>only meaningful when verify is expensive</a:t>
-                      </a:r>
-                    </a:p>
-                  </a:txBody>
-                  <a:tcPr marL="73152" marR="54864" marT="27432" marB="27432">
+                      <a:pPr>
+                        <a:spcBef>
+                          <a:spcPts val="0"/>
+                        </a:spcBef>
+                        <a:spcAft>
+                          <a:spcPts val="0"/>
+                        </a:spcAft>
+                      </a:pPr>
+                      <a:r>
+                        <a:rPr sz="1150" b="0">
+                          <a:solidFill>
+                            <a:srgbClr val="B45309"/>
+                          </a:solidFill>
+                          <a:latin typeface="微软雅黑"/>
+                          <a:ea typeface="微软雅黑"/>
+                        </a:rPr>
+                        <a:t>高 —— 依赖算子接口</a:t>
+                      </a:r>
+                    </a:p>
+                  </a:txBody>
+                  <a:tcPr marL="64008" marR="64008" marT="18288" marB="18288">
                     <a:solidFill>
                       <a:srgbClr val="FFFFFF"/>
                     </a:solidFill>
@@ -5441,8 +7476,8 @@
         </p:nvSpPr>
         <p:spPr>
           <a:xfrm>
-            <a:off x="566928" y="4709160"/>
-            <a:ext cx="11064240" cy="1645920"/>
+            <a:off x="502920" y="5029200"/>
+            <a:ext cx="11247120" cy="1371600"/>
           </a:xfrm>
           <a:prstGeom prst="rect">
             <a:avLst/>
@@ -5464,12 +7499,14 @@
               </a:spcAft>
             </a:pPr>
             <a:r>
-              <a:rPr sz="1500" b="0" i="0">
+              <a:rPr sz="1500" b="0">
                 <a:solidFill>
                   <a:srgbClr val="1B222E"/>
                 </a:solidFill>
+                <a:latin typeface="微软雅黑"/>
+                <a:ea typeface="微软雅黑"/>
               </a:rPr>
-              <a:t>The last row decides the whole question. On an 8B model the PR author could not measure a speedup because verification is already cheap. The saving scales with how expensive the target forward is — which is why a large MoE target is the case where this is worth doing at all.</a:t>
+              <a:t>顺序建议:先在 DSV4/DSA 上把动态 K 端到端跑通并量化收益 —— 它前置条件最全、能最快回答“值不值得”;结论为正再推动 FIA v2 的接口改动,让通用模型受益。</a:t>
             </a:r>
           </a:p>
         </p:txBody>
@@ -5508,8 +7545,8 @@
         </p:nvSpPr>
         <p:spPr>
           <a:xfrm>
-            <a:off x="566928" y="384048"/>
-            <a:ext cx="11064240" cy="914400"/>
+            <a:off x="502920" y="274320"/>
+            <a:ext cx="11247120" cy="868680"/>
           </a:xfrm>
           <a:prstGeom prst="rect">
             <a:avLst/>
@@ -5531,30 +7568,34 @@
               </a:spcAft>
             </a:pPr>
             <a:r>
-              <a:rPr sz="2800" b="1" i="0">
+              <a:rPr sz="2500" b="1">
                 <a:solidFill>
                   <a:srgbClr val="1B222E"/>
                 </a:solidFill>
+                <a:latin typeface="微软雅黑"/>
+                <a:ea typeface="微软雅黑"/>
               </a:rPr>
-              <a:t>What to measure before building anything</a:t>
+              <a:t>动手前先测这四件事</a:t>
             </a:r>
           </a:p>
           <a:p>
             <a:pPr algn="l">
               <a:spcBef>
-                <a:spcPts val="400"/>
+                <a:spcPts val="300"/>
               </a:spcBef>
               <a:spcAft>
                 <a:spcPts val="0"/>
               </a:spcAft>
             </a:pPr>
             <a:r>
-              <a:rPr sz="1350" b="0" i="0">
+              <a:rPr sz="1200" b="0">
                 <a:solidFill>
                   <a:srgbClr val="5B6677"/>
                 </a:solidFill>
+                <a:latin typeface="微软雅黑"/>
+                <a:ea typeface="微软雅黑"/>
               </a:rPr>
-              <a:t>Cheap experiments that decide whether to proceed</a:t>
+              <a:t>任何一项为负,后面的工程都不必做</a:t>
             </a:r>
           </a:p>
         </p:txBody>
@@ -5567,8 +7608,8 @@
         </p:nvSpPr>
         <p:spPr>
           <a:xfrm>
-            <a:off x="566928" y="1298448"/>
-            <a:ext cx="1371600" cy="26000"/>
+            <a:off x="502920" y="1115568"/>
+            <a:ext cx="1188720" cy="24000"/>
           </a:xfrm>
           <a:prstGeom prst="rect">
             <a:avLst/>
@@ -5603,16 +7644,618 @@
           </a:p>
         </p:txBody>
       </p:sp>
+      <p:graphicFrame>
+        <p:nvGraphicFramePr>
+          <p:cNvPr id="4" name="Table 3"/>
+          <p:cNvGraphicFramePr>
+            <a:graphicFrameLocks noGrp="1"/>
+          </p:cNvGraphicFramePr>
+          <p:nvPr/>
+        </p:nvGraphicFramePr>
+        <p:xfrm>
+          <a:off x="502920" y="1572768"/>
+          <a:ext cx="11247119" cy="4663440"/>
+        </p:xfrm>
+        <a:graphic>
+          <a:graphicData uri="http://schemas.openxmlformats.org/drawingml/2006/table">
+            <a:tbl>
+              <a:tblPr firstRow="1" bandRow="1">
+                <a:tableStyleId>{5C22544A-7EE6-4342-B048-85BDC9FD1C3A}</a:tableStyleId>
+              </a:tblPr>
+              <a:tblGrid>
+                <a:gridCol w="1799539"/>
+                <a:gridCol w="5736031"/>
+                <a:gridCol w="3711549"/>
+              </a:tblGrid>
+              <a:tr h="932688">
+                <a:tc>
+                  <a:txBody>
+                    <a:bodyPr wrap="square"/>
+                    <a:lstStyle/>
+                    <a:p>
+                      <a:pPr>
+                        <a:spcBef>
+                          <a:spcPts val="0"/>
+                        </a:spcBef>
+                        <a:spcAft>
+                          <a:spcPts val="0"/>
+                        </a:spcAft>
+                      </a:pPr>
+                      <a:r>
+                        <a:rPr sz="1150" b="1">
+                          <a:solidFill>
+                            <a:srgbClr val="1B222E"/>
+                          </a:solidFill>
+                          <a:latin typeface="微软雅黑"/>
+                          <a:ea typeface="微软雅黑"/>
+                        </a:rPr>
+                        <a:t/>
+                      </a:r>
+                    </a:p>
+                  </a:txBody>
+                  <a:tcPr marL="64008" marR="64008" marT="18288" marB="18288">
+                    <a:solidFill>
+                      <a:srgbClr val="F2F5F9"/>
+                    </a:solidFill>
+                  </a:tcPr>
+                </a:tc>
+                <a:tc>
+                  <a:txBody>
+                    <a:bodyPr wrap="square"/>
+                    <a:lstStyle/>
+                    <a:p>
+                      <a:pPr>
+                        <a:spcBef>
+                          <a:spcPts val="0"/>
+                        </a:spcBef>
+                        <a:spcAft>
+                          <a:spcPts val="0"/>
+                        </a:spcAft>
+                      </a:pPr>
+                      <a:r>
+                        <a:rPr sz="1150" b="1">
+                          <a:solidFill>
+                            <a:srgbClr val="1B222E"/>
+                          </a:solidFill>
+                          <a:latin typeface="微软雅黑"/>
+                          <a:ea typeface="微软雅黑"/>
+                        </a:rPr>
+                        <a:t>测什么</a:t>
+                      </a:r>
+                    </a:p>
+                  </a:txBody>
+                  <a:tcPr marL="64008" marR="64008" marT="18288" marB="18288">
+                    <a:solidFill>
+                      <a:srgbClr val="F2F5F9"/>
+                    </a:solidFill>
+                  </a:tcPr>
+                </a:tc>
+                <a:tc>
+                  <a:txBody>
+                    <a:bodyPr wrap="square"/>
+                    <a:lstStyle/>
+                    <a:p>
+                      <a:pPr>
+                        <a:spcBef>
+                          <a:spcPts val="0"/>
+                        </a:spcBef>
+                        <a:spcAft>
+                          <a:spcPts val="0"/>
+                        </a:spcAft>
+                      </a:pPr>
+                      <a:r>
+                        <a:rPr sz="1150" b="1">
+                          <a:solidFill>
+                            <a:srgbClr val="1B222E"/>
+                          </a:solidFill>
+                          <a:latin typeface="微软雅黑"/>
+                          <a:ea typeface="微软雅黑"/>
+                        </a:rPr>
+                        <a:t>判断标准</a:t>
+                      </a:r>
+                    </a:p>
+                  </a:txBody>
+                  <a:tcPr marL="64008" marR="64008" marT="18288" marB="18288">
+                    <a:solidFill>
+                      <a:srgbClr val="F2F5F9"/>
+                    </a:solidFill>
+                  </a:tcPr>
+                </a:tc>
+              </a:tr>
+              <a:tr h="932688">
+                <a:tc>
+                  <a:txBody>
+                    <a:bodyPr wrap="square"/>
+                    <a:lstStyle/>
+                    <a:p>
+                      <a:pPr>
+                        <a:spcBef>
+                          <a:spcPts val="0"/>
+                        </a:spcBef>
+                        <a:spcAft>
+                          <a:spcPts val="0"/>
+                        </a:spcAft>
+                      </a:pPr>
+                      <a:r>
+                        <a:rPr sz="1150" b="0">
+                          <a:solidFill>
+                            <a:srgbClr val="1B222E"/>
+                          </a:solidFill>
+                          <a:latin typeface="微软雅黑"/>
+                          <a:ea typeface="微软雅黑"/>
+                        </a:rPr>
+                        <a:t>1 · 先量化收益</a:t>
+                      </a:r>
+                    </a:p>
+                  </a:txBody>
+                  <a:tcPr marL="64008" marR="64008" marT="18288" marB="18288">
+                    <a:solidFill>
+                      <a:srgbClr val="FFFFFF"/>
+                    </a:solidFill>
+                  </a:tcPr>
+                </a:tc>
+                <a:tc>
+                  <a:txBody>
+                    <a:bodyPr wrap="square"/>
+                    <a:lstStyle/>
+                    <a:p>
+                      <a:pPr>
+                        <a:spcBef>
+                          <a:spcPts val="0"/>
+                        </a:spcBef>
+                        <a:spcAft>
+                          <a:spcPts val="0"/>
+                        </a:spcAft>
+                      </a:pPr>
+                      <a:r>
+                        <a:rPr sz="1150" b="0">
+                          <a:solidFill>
+                            <a:srgbClr val="1B222E"/>
+                          </a:solidFill>
+                          <a:latin typeface="微软雅黑"/>
+                          <a:ea typeface="微软雅黑"/>
+                        </a:rPr>
+                        <a:t>同一流量下,静态 K 与自适应分配各自的 target 实际验证 token 数</a:t>
+                      </a:r>
+                    </a:p>
+                  </a:txBody>
+                  <a:tcPr marL="64008" marR="64008" marT="18288" marB="18288">
+                    <a:solidFill>
+                      <a:srgbClr val="FFFFFF"/>
+                    </a:solidFill>
+                  </a:tcPr>
+                </a:tc>
+                <a:tc>
+                  <a:txBody>
+                    <a:bodyPr wrap="square"/>
+                    <a:lstStyle/>
+                    <a:p>
+                      <a:pPr>
+                        <a:spcBef>
+                          <a:spcPts val="0"/>
+                        </a:spcBef>
+                        <a:spcAft>
+                          <a:spcPts val="0"/>
+                        </a:spcAft>
+                      </a:pPr>
+                      <a:r>
+                        <a:rPr sz="1150" b="0">
+                          <a:solidFill>
+                            <a:srgbClr val="1B222E"/>
+                          </a:solidFill>
+                          <a:latin typeface="微软雅黑"/>
+                          <a:ea typeface="微软雅黑"/>
+                        </a:rPr>
+                        <a:t>减少量小 → 图工程再省也不回本,直接停</a:t>
+                      </a:r>
+                    </a:p>
+                  </a:txBody>
+                  <a:tcPr marL="64008" marR="64008" marT="18288" marB="18288">
+                    <a:solidFill>
+                      <a:srgbClr val="FFFFFF"/>
+                    </a:solidFill>
+                  </a:tcPr>
+                </a:tc>
+              </a:tr>
+              <a:tr h="932688">
+                <a:tc>
+                  <a:txBody>
+                    <a:bodyPr wrap="square"/>
+                    <a:lstStyle/>
+                    <a:p>
+                      <a:pPr>
+                        <a:spcBef>
+                          <a:spcPts val="0"/>
+                        </a:spcBef>
+                        <a:spcAft>
+                          <a:spcPts val="0"/>
+                        </a:spcAft>
+                      </a:pPr>
+                      <a:r>
+                        <a:rPr sz="1150" b="0">
+                          <a:solidFill>
+                            <a:srgbClr val="1B222E"/>
+                          </a:solidFill>
+                          <a:latin typeface="微软雅黑"/>
+                          <a:ea typeface="微软雅黑"/>
+                        </a:rPr>
+                        <a:t>2 · 四种模式对比</a:t>
+                      </a:r>
+                    </a:p>
+                  </a:txBody>
+                  <a:tcPr marL="64008" marR="64008" marT="18288" marB="18288">
+                    <a:solidFill>
+                      <a:srgbClr val="FFFFFF"/>
+                    </a:solidFill>
+                  </a:tcPr>
+                </a:tc>
+                <a:tc>
+                  <a:txBody>
+                    <a:bodyPr wrap="square"/>
+                    <a:lstStyle/>
+                    <a:p>
+                      <a:pPr>
+                        <a:spcBef>
+                          <a:spcPts val="0"/>
+                        </a:spcBef>
+                        <a:spcAft>
+                          <a:spcPts val="0"/>
+                        </a:spcAft>
+                      </a:pPr>
+                      <a:r>
+                        <a:rPr sz="1150" b="0">
+                          <a:solidFill>
+                            <a:srgbClr val="1B222E"/>
+                          </a:solidFill>
+                          <a:latin typeface="微软雅黑"/>
+                          <a:ea typeface="微软雅黑"/>
+                        </a:rPr>
+                        <a:t>静态K全图 / 动态K eager / 动态K piecewise / 动态K全图。</a:t>
+                      </a:r>
+                    </a:p>
+                    <a:p>
+                      <a:pPr>
+                        <a:spcBef>
+                          <a:spcPts val="0"/>
+                        </a:spcBef>
+                        <a:spcAft>
+                          <a:spcPts val="0"/>
+                        </a:spcAft>
+                      </a:pPr>
+                      <a:r>
+                        <a:rPr sz="1150" b="0">
+                          <a:solidFill>
+                            <a:srgbClr val="1B222E"/>
+                          </a:solidFill>
+                          <a:latin typeface="微软雅黑"/>
+                          <a:ea typeface="微软雅黑"/>
+                        </a:rPr>
+                        <a:t>统计:验证 token 数、图命中率、padding 数、host metadata 时间、</a:t>
+                      </a:r>
+                    </a:p>
+                    <a:p>
+                      <a:pPr>
+                        <a:spcBef>
+                          <a:spcPts val="0"/>
+                        </a:spcBef>
+                        <a:spcAft>
+                          <a:spcPts val="0"/>
+                        </a:spcAft>
+                      </a:pPr>
+                      <a:r>
+                        <a:rPr sz="1150" b="0">
+                          <a:solidFill>
+                            <a:srgbClr val="1B222E"/>
+                          </a:solidFill>
+                          <a:latin typeface="微软雅黑"/>
+                          <a:ea typeface="微软雅黑"/>
+                        </a:rPr>
+                        <a:t>workspace+tiling 时间、graph update 时间、attention 时间、端到端时延</a:t>
+                      </a:r>
+                    </a:p>
+                  </a:txBody>
+                  <a:tcPr marL="64008" marR="64008" marT="18288" marB="18288">
+                    <a:solidFill>
+                      <a:srgbClr val="FFFFFF"/>
+                    </a:solidFill>
+                  </a:tcPr>
+                </a:tc>
+                <a:tc>
+                  <a:txBody>
+                    <a:bodyPr wrap="square"/>
+                    <a:lstStyle/>
+                    <a:p>
+                      <a:pPr>
+                        <a:spcBef>
+                          <a:spcPts val="0"/>
+                        </a:spcBef>
+                        <a:spcAft>
+                          <a:spcPts val="0"/>
+                        </a:spcAft>
+                      </a:pPr>
+                      <a:r>
+                        <a:rPr sz="1150" b="0">
+                          <a:solidFill>
+                            <a:srgbClr val="1B222E"/>
+                          </a:solidFill>
+                          <a:latin typeface="微软雅黑"/>
+                          <a:ea typeface="微软雅黑"/>
+                        </a:rPr>
+                        <a:t>端到端时延必须优于静态K全图,</a:t>
+                      </a:r>
+                    </a:p>
+                    <a:p>
+                      <a:pPr>
+                        <a:spcBef>
+                          <a:spcPts val="0"/>
+                        </a:spcBef>
+                        <a:spcAft>
+                          <a:spcPts val="0"/>
+                        </a:spcAft>
+                      </a:pPr>
+                      <a:r>
+                        <a:rPr sz="1150" b="0">
+                          <a:solidFill>
+                            <a:srgbClr val="1B222E"/>
+                          </a:solidFill>
+                          <a:latin typeface="微软雅黑"/>
+                          <a:ea typeface="微软雅黑"/>
+                        </a:rPr>
+                        <a:t>否则收益被图外开销吃掉</a:t>
+                      </a:r>
+                    </a:p>
+                  </a:txBody>
+                  <a:tcPr marL="64008" marR="64008" marT="18288" marB="18288">
+                    <a:solidFill>
+                      <a:srgbClr val="FFFFFF"/>
+                    </a:solidFill>
+                  </a:tcPr>
+                </a:tc>
+              </a:tr>
+              <a:tr h="932688">
+                <a:tc>
+                  <a:txBody>
+                    <a:bodyPr wrap="square"/>
+                    <a:lstStyle/>
+                    <a:p>
+                      <a:pPr>
+                        <a:spcBef>
+                          <a:spcPts val="0"/>
+                        </a:spcBef>
+                        <a:spcAft>
+                          <a:spcPts val="0"/>
+                        </a:spcAft>
+                      </a:pPr>
+                      <a:r>
+                        <a:rPr sz="1150" b="0">
+                          <a:solidFill>
+                            <a:srgbClr val="1B222E"/>
+                          </a:solidFill>
+                          <a:latin typeface="微软雅黑"/>
+                          <a:ea typeface="微软雅黑"/>
+                        </a:rPr>
+                        <a:t>3 · 审计 host 往返</a:t>
+                      </a:r>
+                    </a:p>
+                  </a:txBody>
+                  <a:tcPr marL="64008" marR="64008" marT="18288" marB="18288">
+                    <a:solidFill>
+                      <a:srgbClr val="FFFFFF"/>
+                    </a:solidFill>
+                  </a:tcPr>
+                </a:tc>
+                <a:tc>
+                  <a:txBody>
+                    <a:bodyPr wrap="square"/>
+                    <a:lstStyle/>
+                    <a:p>
+                      <a:pPr>
+                        <a:spcBef>
+                          <a:spcPts val="0"/>
+                        </a:spcBef>
+                        <a:spcAft>
+                          <a:spcPts val="0"/>
+                        </a:spcAft>
+                      </a:pPr>
+                      <a:r>
+                        <a:rPr sz="1150" b="0">
+                          <a:solidFill>
+                            <a:srgbClr val="1B222E"/>
+                          </a:solidFill>
+                          <a:latin typeface="微软雅黑"/>
+                          <a:ea typeface="微软雅黑"/>
+                        </a:rPr>
+                        <a:t>confidence head → K_i → prefix 选择 → index compaction →</a:t>
+                      </a:r>
+                    </a:p>
+                    <a:p>
+                      <a:pPr>
+                        <a:spcBef>
+                          <a:spcPts val="0"/>
+                        </a:spcBef>
+                        <a:spcAft>
+                          <a:spcPts val="0"/>
+                        </a:spcAft>
+                      </a:pPr>
+                      <a:r>
+                        <a:rPr sz="1150" b="0">
+                          <a:solidFill>
+                            <a:srgbClr val="1B222E"/>
+                          </a:solidFill>
+                          <a:latin typeface="微软雅黑"/>
+                          <a:ea typeface="微软雅黑"/>
+                        </a:rPr>
+                        <a:t>position / slot mapping → query length,全链路是否留在设备</a:t>
+                      </a:r>
+                    </a:p>
+                  </a:txBody>
+                  <a:tcPr marL="64008" marR="64008" marT="18288" marB="18288">
+                    <a:solidFill>
+                      <a:srgbClr val="FFFFFF"/>
+                    </a:solidFill>
+                  </a:tcPr>
+                </a:tc>
+                <a:tc>
+                  <a:txBody>
+                    <a:bodyPr wrap="square"/>
+                    <a:lstStyle/>
+                    <a:p>
+                      <a:pPr>
+                        <a:spcBef>
+                          <a:spcPts val="0"/>
+                        </a:spcBef>
+                        <a:spcAft>
+                          <a:spcPts val="0"/>
+                        </a:spcAft>
+                      </a:pPr>
+                      <a:r>
+                        <a:rPr sz="1150" b="0">
+                          <a:solidFill>
+                            <a:srgbClr val="1B222E"/>
+                          </a:solidFill>
+                          <a:latin typeface="微软雅黑"/>
+                          <a:ea typeface="微软雅黑"/>
+                        </a:rPr>
+                        <a:t>出现 .cpu() / .tolist() / 隐式 D2H</a:t>
+                      </a:r>
+                    </a:p>
+                    <a:p>
+                      <a:pPr>
+                        <a:spcBef>
+                          <a:spcPts val="0"/>
+                        </a:spcBef>
+                        <a:spcAft>
+                          <a:spcPts val="0"/>
+                        </a:spcAft>
+                      </a:pPr>
+                      <a:r>
+                        <a:rPr sz="1150" b="0">
+                          <a:solidFill>
+                            <a:srgbClr val="1B222E"/>
+                          </a:solidFill>
+                          <a:latin typeface="微软雅黑"/>
+                          <a:ea typeface="微软雅黑"/>
+                        </a:rPr>
+                        <a:t>即为阻断点</a:t>
+                      </a:r>
+                    </a:p>
+                  </a:txBody>
+                  <a:tcPr marL="64008" marR="64008" marT="18288" marB="18288">
+                    <a:solidFill>
+                      <a:srgbClr val="FFFFFF"/>
+                    </a:solidFill>
+                  </a:tcPr>
+                </a:tc>
+              </a:tr>
+              <a:tr h="932688">
+                <a:tc>
+                  <a:txBody>
+                    <a:bodyPr wrap="square"/>
+                    <a:lstStyle/>
+                    <a:p>
+                      <a:pPr>
+                        <a:spcBef>
+                          <a:spcPts val="0"/>
+                        </a:spcBef>
+                        <a:spcAft>
+                          <a:spcPts val="0"/>
+                        </a:spcAft>
+                      </a:pPr>
+                      <a:r>
+                        <a:rPr sz="1150" b="0">
+                          <a:solidFill>
+                            <a:srgbClr val="1B222E"/>
+                          </a:solidFill>
+                          <a:latin typeface="微软雅黑"/>
+                          <a:ea typeface="微软雅黑"/>
+                        </a:rPr>
+                        <a:t>4 · 确定分桶策略</a:t>
+                      </a:r>
+                    </a:p>
+                  </a:txBody>
+                  <a:tcPr marL="64008" marR="64008" marT="18288" marB="18288">
+                    <a:solidFill>
+                      <a:srgbClr val="FFFFFF"/>
+                    </a:solidFill>
+                  </a:tcPr>
+                </a:tc>
+                <a:tc>
+                  <a:txBody>
+                    <a:bodyPr wrap="square"/>
+                    <a:lstStyle/>
+                    <a:p>
+                      <a:pPr>
+                        <a:spcBef>
+                          <a:spcPts val="0"/>
+                        </a:spcBef>
+                        <a:spcAft>
+                          <a:spcPts val="0"/>
+                        </a:spcAft>
+                      </a:pPr>
+                      <a:r>
+                        <a:rPr sz="1150" b="0">
+                          <a:solidFill>
+                            <a:srgbClr val="1B222E"/>
+                          </a:solidFill>
+                          <a:latin typeface="微软雅黑"/>
+                          <a:ea typeface="微软雅黑"/>
+                        </a:rPr>
+                        <a:t>按 (batch bucket, 总验证 token bucket) 建图键与 workspace 键</a:t>
+                      </a:r>
+                    </a:p>
+                  </a:txBody>
+                  <a:tcPr marL="64008" marR="64008" marT="18288" marB="18288">
+                    <a:solidFill>
+                      <a:srgbClr val="FFFFFF"/>
+                    </a:solidFill>
+                  </a:tcPr>
+                </a:tc>
+                <a:tc>
+                  <a:txBody>
+                    <a:bodyPr wrap="square"/>
+                    <a:lstStyle/>
+                    <a:p>
+                      <a:pPr>
+                        <a:spcBef>
+                          <a:spcPts val="0"/>
+                        </a:spcBef>
+                        <a:spcAft>
+                          <a:spcPts val="0"/>
+                        </a:spcAft>
+                      </a:pPr>
+                      <a:r>
+                        <a:rPr sz="1150" b="0">
+                          <a:solidFill>
+                            <a:srgbClr val="1B222E"/>
+                          </a:solidFill>
+                          <a:latin typeface="微软雅黑"/>
+                          <a:ea typeface="微软雅黑"/>
+                        </a:rPr>
+                        <a:t>捕图数量可控 且 padding 浪费可接受</a:t>
+                      </a:r>
+                    </a:p>
+                  </a:txBody>
+                  <a:tcPr marL="64008" marR="64008" marT="18288" marB="18288">
+                    <a:solidFill>
+                      <a:srgbClr val="FFFFFF"/>
+                    </a:solidFill>
+                  </a:tcPr>
+                </a:tc>
+              </a:tr>
+            </a:tbl>
+          </a:graphicData>
+        </a:graphic>
+      </p:graphicFrame>
       <p:sp>
         <p:nvSpPr>
-          <p:cNvPr id="4" name="TextBox 3"/>
+          <p:cNvPr id="5" name="TextBox 4"/>
           <p:cNvSpPr txBox="1"/>
           <p:nvPr/>
         </p:nvSpPr>
         <p:spPr>
           <a:xfrm>
-            <a:off x="566928" y="1645920"/>
-            <a:ext cx="11064240" cy="4572000"/>
+            <a:off x="502920" y="5623560"/>
+            <a:ext cx="11247120" cy="914400"/>
           </a:xfrm>
           <a:prstGeom prst="rect">
             <a:avLst/>
@@ -5634,622 +8277,14 @@
               </a:spcAft>
             </a:pPr>
             <a:r>
-              <a:rPr sz="1700" b="1" i="0">
+              <a:rPr sz="1500" b="1">
                 <a:solidFill>
                   <a:srgbClr val="1F6FEB"/>
                 </a:solidFill>
+                <a:latin typeface="微软雅黑"/>
+                <a:ea typeface="微软雅黑"/>
               </a:rPr>
-              <a:t>1 · Size the prize</a:t>
-            </a:r>
-          </a:p>
-          <a:p>
-            <a:pPr algn="l">
-              <a:spcBef>
-                <a:spcPts val="400"/>
-              </a:spcBef>
-              <a:spcAft>
-                <a:spcPts val="0"/>
-              </a:spcAft>
-            </a:pPr>
-            <a:r>
-              <a:rPr sz="1450" b="0" i="0">
-                <a:solidFill>
-                  <a:srgbClr val="1B222E"/>
-                </a:solidFill>
-              </a:rPr>
-              <a:t>Measure the target-side token count under static K versus an adaptive allocation on the same traffic. If the reduction is small, no amount of graph engineering pays for itself.</a:t>
-            </a:r>
-          </a:p>
-          <a:p>
-            <a:pPr algn="l">
-              <a:spcBef>
-                <a:spcPts val="1600"/>
-              </a:spcBef>
-              <a:spcAft>
-                <a:spcPts val="0"/>
-              </a:spcAft>
-            </a:pPr>
-            <a:r>
-              <a:rPr sz="1700" b="1" i="0">
-                <a:solidFill>
-                  <a:srgbClr val="1F6FEB"/>
-                </a:solidFill>
-              </a:rPr>
-              <a:t>2 · Four-way comparison</a:t>
-            </a:r>
-          </a:p>
-          <a:p>
-            <a:pPr algn="l">
-              <a:spcBef>
-                <a:spcPts val="400"/>
-              </a:spcBef>
-              <a:spcAft>
-                <a:spcPts val="0"/>
-              </a:spcAft>
-            </a:pPr>
-            <a:r>
-              <a:rPr sz="1450" b="0" i="0">
-                <a:solidFill>
-                  <a:srgbClr val="1B222E"/>
-                </a:solidFill>
-              </a:rPr>
-              <a:t>static-K full graph · adaptive-K eager · adaptive-K piecewise graph · adaptive-K full graph. Report verified tokens, graph replay hit rate, padding tokens, host metadata time, workspace/tiling time, graph-update time, attention time, end-to-end decode latency.</a:t>
-            </a:r>
-          </a:p>
-          <a:p>
-            <a:pPr algn="l">
-              <a:spcBef>
-                <a:spcPts val="1600"/>
-              </a:spcBef>
-              <a:spcAft>
-                <a:spcPts val="0"/>
-              </a:spcAft>
-            </a:pPr>
-            <a:r>
-              <a:rPr sz="1700" b="1" i="0">
-                <a:solidFill>
-                  <a:srgbClr val="1F6FEB"/>
-                </a:solidFill>
-              </a:rPr>
-              <a:t>3 · Audit the K_i path for host round-trips</a:t>
-            </a:r>
-          </a:p>
-          <a:p>
-            <a:pPr algn="l">
-              <a:spcBef>
-                <a:spcPts val="400"/>
-              </a:spcBef>
-              <a:spcAft>
-                <a:spcPts val="0"/>
-              </a:spcAft>
-            </a:pPr>
-            <a:r>
-              <a:rPr sz="1450" b="0" i="0">
-                <a:solidFill>
-                  <a:srgbClr val="1B222E"/>
-                </a:solidFill>
-              </a:rPr>
-              <a:t>Confirm that confidence-head output, prefix selection, index compaction, position and slot mapping all stay on device — no .cpu(), .tolist() or implicit D2H between the confidence head and attention.</a:t>
-            </a:r>
-          </a:p>
-          <a:p>
-            <a:pPr algn="l">
-              <a:spcBef>
-                <a:spcPts val="1600"/>
-              </a:spcBef>
-              <a:spcAft>
-                <a:spcPts val="0"/>
-              </a:spcAft>
-            </a:pPr>
-            <a:r>
-              <a:rPr sz="1700" b="1" i="0">
-                <a:solidFill>
-                  <a:srgbClr val="1F6FEB"/>
-                </a:solidFill>
-              </a:rPr>
-              <a:t>4 · Decide the graph key</a:t>
-            </a:r>
-          </a:p>
-          <a:p>
-            <a:pPr algn="l">
-              <a:spcBef>
-                <a:spcPts val="400"/>
-              </a:spcBef>
-              <a:spcAft>
-                <a:spcPts val="0"/>
-              </a:spcAft>
-            </a:pPr>
-            <a:r>
-              <a:rPr sz="1450" b="0" i="0">
-                <a:solidFill>
-                  <a:srgbClr val="1B222E"/>
-                </a:solidFill>
-              </a:rPr>
-              <a:t>Bucket by (batch size, total verify tokens) rather than capturing one graph per distinct K_i vector, and pre-allocate workspace per bucket at capture time.</a:t>
-            </a:r>
-          </a:p>
-        </p:txBody>
-      </p:sp>
-    </p:spTree>
-  </p:cSld>
-  <p:clrMapOvr>
-    <a:masterClrMapping/>
-  </p:clrMapOvr>
-</p:sld>
-</file>
-
-<file path=ppt/slides/slide8.xml><?xml version="1.0" encoding="utf-8"?>
-<p:sld xmlns:a="http://schemas.openxmlformats.org/drawingml/2006/main" xmlns:p="http://schemas.openxmlformats.org/presentationml/2006/main" xmlns:r="http://schemas.openxmlformats.org/officeDocument/2006/relationships">
-  <p:cSld>
-    <p:bg>
-      <p:bgPr>
-        <a:solidFill>
-          <a:srgbClr val="FFFFFF"/>
-        </a:solidFill>
-        <a:effectLst/>
-      </p:bgPr>
-    </p:bg>
-    <p:spTree>
-      <p:nvGrpSpPr>
-        <p:cNvPr id="1" name=""/>
-        <p:cNvGrpSpPr/>
-        <p:nvPr/>
-      </p:nvGrpSpPr>
-      <p:grpSpPr/>
-      <p:sp>
-        <p:nvSpPr>
-          <p:cNvPr id="2" name="TextBox 1"/>
-          <p:cNvSpPr txBox="1"/>
-          <p:nvPr/>
-        </p:nvSpPr>
-        <p:spPr>
-          <a:xfrm>
-            <a:off x="566928" y="384048"/>
-            <a:ext cx="11064240" cy="914400"/>
-          </a:xfrm>
-          <a:prstGeom prst="rect">
-            <a:avLst/>
-          </a:prstGeom>
-          <a:noFill/>
-        </p:spPr>
-        <p:txBody>
-          <a:bodyPr wrap="square">
-            <a:spAutoFit/>
-          </a:bodyPr>
-          <a:lstStyle/>
-          <a:p>
-            <a:pPr algn="l">
-              <a:spcBef>
-                <a:spcPts val="0"/>
-              </a:spcBef>
-              <a:spcAft>
-                <a:spcPts val="0"/>
-              </a:spcAft>
-            </a:pPr>
-            <a:r>
-              <a:rPr sz="2800" b="1" i="0">
-                <a:solidFill>
-                  <a:srgbClr val="1B222E"/>
-                </a:solidFill>
-              </a:rPr>
-              <a:t>Bottom line</a:t>
-            </a:r>
-          </a:p>
-        </p:txBody>
-      </p:sp>
-      <p:sp>
-        <p:nvSpPr>
-          <p:cNvPr id="3" name="Rectangle 2"/>
-          <p:cNvSpPr/>
-          <p:nvPr/>
-        </p:nvSpPr>
-        <p:spPr>
-          <a:xfrm>
-            <a:off x="566928" y="1298448"/>
-            <a:ext cx="1371600" cy="26000"/>
-          </a:xfrm>
-          <a:prstGeom prst="rect">
-            <a:avLst/>
-          </a:prstGeom>
-          <a:solidFill>
-            <a:srgbClr val="1F6FEB"/>
-          </a:solidFill>
-          <a:ln>
-            <a:noFill/>
-          </a:ln>
-          <a:effectLst/>
-        </p:spPr>
-        <p:style>
-          <a:lnRef idx="1">
-            <a:schemeClr val="accent1"/>
-          </a:lnRef>
-          <a:fillRef idx="3">
-            <a:schemeClr val="accent1"/>
-          </a:fillRef>
-          <a:effectRef idx="2">
-            <a:schemeClr val="accent1"/>
-          </a:effectRef>
-          <a:fontRef idx="minor">
-            <a:schemeClr val="lt1"/>
-          </a:fontRef>
-        </p:style>
-        <p:txBody>
-          <a:bodyPr rtlCol="0" anchor="ctr"/>
-          <a:lstStyle/>
-          <a:p>
-            <a:pPr algn="ctr"/>
-          </a:p>
-        </p:txBody>
-      </p:sp>
-      <p:sp>
-        <p:nvSpPr>
-          <p:cNvPr id="4" name="TextBox 3"/>
-          <p:cNvSpPr txBox="1"/>
-          <p:nvPr/>
-        </p:nvSpPr>
-        <p:spPr>
-          <a:xfrm>
-            <a:off x="566928" y="1691640"/>
-            <a:ext cx="11064240" cy="4572000"/>
-          </a:xfrm>
-          <a:prstGeom prst="rect">
-            <a:avLst/>
-          </a:prstGeom>
-          <a:noFill/>
-        </p:spPr>
-        <p:txBody>
-          <a:bodyPr wrap="square">
-            <a:spAutoFit/>
-          </a:bodyPr>
-          <a:lstStyle/>
-          <a:p>
-            <a:pPr algn="l">
-              <a:spcBef>
-                <a:spcPts val="0"/>
-              </a:spcBef>
-              <a:spcAft>
-                <a:spcPts val="0"/>
-              </a:spcAft>
-            </a:pPr>
-            <a:r>
-              <a:rPr sz="1900" b="1" i="0">
-                <a:solidFill>
-                  <a:srgbClr val="1B222E"/>
-                </a:solidFill>
-              </a:rPr>
-              <a:t>“NPU is less graph-friendly for adaptive speculation” is true, but not for the reason usually given.</a:t>
-            </a:r>
-          </a:p>
-          <a:p>
-            <a:pPr algn="l">
-              <a:spcBef>
-                <a:spcPts val="1400"/>
-              </a:spcBef>
-              <a:spcAft>
-                <a:spcPts val="0"/>
-              </a:spcAft>
-            </a:pPr>
-            <a:r>
-              <a:rPr sz="1600" b="0" i="0">
-                <a:solidFill>
-                  <a:srgbClr val="1B222E"/>
-                </a:solidFill>
-              </a:rPr>
-              <a:t>It is not that the hardware cannot do dynamic shapes. On the DSA path that DeepSeek-V4-Flash uses, sequence lengths are already device tensors — the prerequisite everyone worries about is met.</a:t>
-            </a:r>
-          </a:p>
-          <a:p>
-            <a:pPr algn="l">
-              <a:spcBef>
-                <a:spcPts val="1000"/>
-              </a:spcBef>
-              <a:spcAft>
-                <a:spcPts val="0"/>
-              </a:spcAft>
-            </a:pPr>
-            <a:r>
-              <a:rPr sz="1600" b="0" i="0">
-                <a:solidFill>
-                  <a:srgbClr val="1B222E"/>
-                </a:solidFill>
-              </a:rPr>
-              <a:t>The genuine costs are narrower and fixable: a workspace cache keyed by the exact token count, per-layer graph-task updates, and host-side metadata on the generic FIA path.</a:t>
-            </a:r>
-          </a:p>
-          <a:p>
-            <a:pPr algn="l">
-              <a:spcBef>
-                <a:spcPts val="1000"/>
-              </a:spcBef>
-              <a:spcAft>
-                <a:spcPts val="0"/>
-              </a:spcAft>
-            </a:pPr>
-            <a:r>
-              <a:rPr sz="1600" b="0" i="0">
-                <a:solidFill>
-                  <a:srgbClr val="1B222E"/>
-                </a:solidFill>
-              </a:rPr>
-              <a:t>And the GPU-side reference does not yet prove a speedup — it was measured on a model where verification is cheap. The case for doing this at all rests on an expensive target model, which is exactly the case worth measuring first.</a:t>
-            </a:r>
-          </a:p>
-          <a:p>
-            <a:pPr algn="l">
-              <a:spcBef>
-                <a:spcPts val="1800"/>
-              </a:spcBef>
-              <a:spcAft>
-                <a:spcPts val="0"/>
-              </a:spcAft>
-            </a:pPr>
-            <a:r>
-              <a:rPr sz="1800" b="1" i="0">
-                <a:solidFill>
-                  <a:srgbClr val="1F6FEB"/>
-                </a:solidFill>
-              </a:rPr>
-              <a:t>Recommendation: quantify the saving before engineering the graph path.</a:t>
-            </a:r>
-          </a:p>
-        </p:txBody>
-      </p:sp>
-    </p:spTree>
-  </p:cSld>
-  <p:clrMapOvr>
-    <a:masterClrMapping/>
-  </p:clrMapOvr>
-</p:sld>
-</file>
-
-<file path=ppt/slides/slide9.xml><?xml version="1.0" encoding="utf-8"?>
-<p:sld xmlns:a="http://schemas.openxmlformats.org/drawingml/2006/main" xmlns:p="http://schemas.openxmlformats.org/presentationml/2006/main" xmlns:r="http://schemas.openxmlformats.org/officeDocument/2006/relationships">
-  <p:cSld>
-    <p:bg>
-      <p:bgPr>
-        <a:solidFill>
-          <a:srgbClr val="FFFFFF"/>
-        </a:solidFill>
-        <a:effectLst/>
-      </p:bgPr>
-    </p:bg>
-    <p:spTree>
-      <p:nvGrpSpPr>
-        <p:cNvPr id="1" name=""/>
-        <p:cNvGrpSpPr/>
-        <p:nvPr/>
-      </p:nvGrpSpPr>
-      <p:grpSpPr/>
-      <p:sp>
-        <p:nvSpPr>
-          <p:cNvPr id="2" name="TextBox 1"/>
-          <p:cNvSpPr txBox="1"/>
-          <p:nvPr/>
-        </p:nvSpPr>
-        <p:spPr>
-          <a:xfrm>
-            <a:off x="566928" y="384048"/>
-            <a:ext cx="11064240" cy="914400"/>
-          </a:xfrm>
-          <a:prstGeom prst="rect">
-            <a:avLst/>
-          </a:prstGeom>
-          <a:noFill/>
-        </p:spPr>
-        <p:txBody>
-          <a:bodyPr wrap="square">
-            <a:spAutoFit/>
-          </a:bodyPr>
-          <a:lstStyle/>
-          <a:p>
-            <a:pPr algn="l">
-              <a:spcBef>
-                <a:spcPts val="0"/>
-              </a:spcBef>
-              <a:spcAft>
-                <a:spcPts val="0"/>
-              </a:spcAft>
-            </a:pPr>
-            <a:r>
-              <a:rPr sz="2800" b="1" i="0">
-                <a:solidFill>
-                  <a:srgbClr val="1B222E"/>
-                </a:solidFill>
-              </a:rPr>
-              <a:t>Sources</a:t>
-            </a:r>
-          </a:p>
-        </p:txBody>
-      </p:sp>
-      <p:sp>
-        <p:nvSpPr>
-          <p:cNvPr id="3" name="Rectangle 2"/>
-          <p:cNvSpPr/>
-          <p:nvPr/>
-        </p:nvSpPr>
-        <p:spPr>
-          <a:xfrm>
-            <a:off x="566928" y="1298448"/>
-            <a:ext cx="1371600" cy="26000"/>
-          </a:xfrm>
-          <a:prstGeom prst="rect">
-            <a:avLst/>
-          </a:prstGeom>
-          <a:solidFill>
-            <a:srgbClr val="1F6FEB"/>
-          </a:solidFill>
-          <a:ln>
-            <a:noFill/>
-          </a:ln>
-          <a:effectLst/>
-        </p:spPr>
-        <p:style>
-          <a:lnRef idx="1">
-            <a:schemeClr val="accent1"/>
-          </a:lnRef>
-          <a:fillRef idx="3">
-            <a:schemeClr val="accent1"/>
-          </a:fillRef>
-          <a:effectRef idx="2">
-            <a:schemeClr val="accent1"/>
-          </a:effectRef>
-          <a:fontRef idx="minor">
-            <a:schemeClr val="lt1"/>
-          </a:fontRef>
-        </p:style>
-        <p:txBody>
-          <a:bodyPr rtlCol="0" anchor="ctr"/>
-          <a:lstStyle/>
-          <a:p>
-            <a:pPr algn="ctr"/>
-          </a:p>
-        </p:txBody>
-      </p:sp>
-      <p:sp>
-        <p:nvSpPr>
-          <p:cNvPr id="4" name="TextBox 3"/>
-          <p:cNvSpPr txBox="1"/>
-          <p:nvPr/>
-        </p:nvSpPr>
-        <p:spPr>
-          <a:xfrm>
-            <a:off x="566928" y="1691640"/>
-            <a:ext cx="11064240" cy="4572000"/>
-          </a:xfrm>
-          <a:prstGeom prst="rect">
-            <a:avLst/>
-          </a:prstGeom>
-          <a:noFill/>
-        </p:spPr>
-        <p:txBody>
-          <a:bodyPr wrap="square">
-            <a:spAutoFit/>
-          </a:bodyPr>
-          <a:lstStyle/>
-          <a:p>
-            <a:pPr algn="l">
-              <a:spcBef>
-                <a:spcPts val="0"/>
-              </a:spcBef>
-              <a:spcAft>
-                <a:spcPts val="0"/>
-              </a:spcAft>
-            </a:pPr>
-            <a:r>
-              <a:rPr sz="1400" b="0" i="0">
-                <a:solidFill>
-                  <a:srgbClr val="1B222E"/>
-                </a:solidFill>
-              </a:rPr>
-              <a:t>· vLLM PR #48692 — [MRV2][Spec Decode] Adaptive Speculative Decoding, Initial Support (closed, needs-rebase)</a:t>
-            </a:r>
-          </a:p>
-          <a:p>
-            <a:pPr algn="l">
-              <a:spcBef>
-                <a:spcPts val="900"/>
-              </a:spcBef>
-              <a:spcAft>
-                <a:spcPts val="0"/>
-              </a:spcAft>
-            </a:pPr>
-            <a:r>
-              <a:rPr sz="1400" b="0" i="0">
-                <a:solidFill>
-                  <a:srgbClr val="1B222E"/>
-                </a:solidFill>
-              </a:rPr>
-              <a:t>· vllm-ascend — vllm_ascend/attention/attention_v1.py (FIA v2 workspace cache, graph task update)</a:t>
-            </a:r>
-          </a:p>
-          <a:p>
-            <a:pPr algn="l">
-              <a:spcBef>
-                <a:spcPts val="900"/>
-              </a:spcBef>
-              <a:spcAft>
-                <a:spcPts val="0"/>
-              </a:spcAft>
-            </a:pPr>
-            <a:r>
-              <a:rPr sz="1400" b="0" i="0">
-                <a:solidFill>
-                  <a:srgbClr val="1B222E"/>
-                </a:solidFill>
-              </a:rPr>
-              <a:t>· vllm-ascend — vllm_ascend/attention/dsa_v1.py (DSA / lightning indexer call sites)</a:t>
-            </a:r>
-          </a:p>
-          <a:p>
-            <a:pPr algn="l">
-              <a:spcBef>
-                <a:spcPts val="900"/>
-              </a:spcBef>
-              <a:spcAft>
-                <a:spcPts val="0"/>
-              </a:spcAft>
-            </a:pPr>
-            <a:r>
-              <a:rPr sz="1400" b="0" i="0">
-                <a:solidFill>
-                  <a:srgbClr val="1B222E"/>
-                </a:solidFill>
-              </a:rPr>
-              <a:t>· vllm-ascend — vllm_ascend/device/device_op.py (execute_sparse_flash_attention_process signature)</a:t>
-            </a:r>
-          </a:p>
-          <a:p>
-            <a:pPr algn="l">
-              <a:spcBef>
-                <a:spcPts val="900"/>
-              </a:spcBef>
-              <a:spcAft>
-                <a:spcPts val="0"/>
-              </a:spcAft>
-            </a:pPr>
-            <a:r>
-              <a:rPr sz="1400" b="0" i="0">
-                <a:solidFill>
-                  <a:srgbClr val="1B222E"/>
-                </a:solidFill>
-              </a:rPr>
-              <a:t>· vllm-ascend — vllm_ascend/attention/utils.py (cache_graph_workspace)</a:t>
-            </a:r>
-          </a:p>
-          <a:p>
-            <a:pPr algn="l">
-              <a:spcBef>
-                <a:spcPts val="900"/>
-              </a:spcBef>
-              <a:spcAft>
-                <a:spcPts val="0"/>
-              </a:spcAft>
-            </a:pPr>
-            <a:r>
-              <a:rPr sz="1400" b="0" i="0">
-                <a:solidFill>
-                  <a:srgbClr val="1B222E"/>
-                </a:solidFill>
-              </a:rPr>
-              <a:t>· vllm-ascend — vllm_ascend/worker/v2/model_runner.py (MRV2 support is present)</a:t>
-            </a:r>
-          </a:p>
-          <a:p>
-            <a:pPr algn="l">
-              <a:spcBef>
-                <a:spcPts val="900"/>
-              </a:spcBef>
-              <a:spcAft>
-                <a:spcPts val="0"/>
-              </a:spcAft>
-            </a:pPr>
-            <a:r>
-              <a:rPr sz="1400" b="0" i="0">
-                <a:solidFill>
-                  <a:srgbClr val="1B222E"/>
-                </a:solidFill>
-              </a:rPr>
-              <a:t>· Ascend operator documentation — torch_npu.npu_fused_infer_attention_score / npu_fusion_attention</a:t>
+              <a:t>一句话:自适应投机在算法上一定省 token,但省下的是否大于为固定形状付出的代价 —— 这是个必须用数据回答的问题,不是设计问题。</a:t>
             </a:r>
           </a:p>
         </p:txBody>
